--- a/Topic_C/Exam_Practice/TC-L09_Speaking_Workshop_Shopping_Prices_Consumer_Choices.pptx
+++ b/Topic_C/Exam_Practice/TC-L09_Speaking_Workshop_Shopping_Prices_Consumer_Choices.pptx
@@ -615,7 +615,11 @@
           <a:lstStyle/>
           <a:p>
             <a:r>
-              <a:rPr lang="en-US" dirty="0"/>
+              <a:rPr lang="ar-SA" dirty="0">
+                <a:latin typeface="Amiri" pitchFamily="2" charset="-78"/>
+                <a:ea typeface="Amiri" pitchFamily="2" charset="-78"/>
+                <a:cs typeface="Amiri" pitchFamily="2" charset="-78"/>
+              </a:rPr>
               <a:t>ROLE PLAY C (Develop) — customer service.
 SET-UP IN THE BREAKOUT ROOM: A = examiner (reads the left column ONLY — the questions, in order), B = candidate (sees the task column; Core may use the help column), C = observer (ticks the feedback checklist). 1 minute preparation, about 3 minutes speaking, 1 minute feedback, then rotate.
 Task ! is the unexpected question: in the exam the candidate has not seen it — the examiner should read it without warning.
@@ -707,7 +711,11 @@
           <a:lstStyle/>
           <a:p>
             <a:r>
-              <a:rPr lang="en-US" dirty="0"/>
+              <a:rPr lang="ar-SA" dirty="0">
+                <a:latin typeface="Amiri" pitchFamily="2" charset="-78"/>
+                <a:ea typeface="Amiri" pitchFamily="2" charset="-78"/>
+                <a:cs typeface="Amiri" pitchFamily="2" charset="-78"/>
+              </a:rPr>
               <a:t>ROLE PLAY D (Stretch) — a consumer-rights podcast.
 SET-UP IN THE BREAKOUT ROOM: A = examiner (reads the left column ONLY — the questions, in order), B = candidate (sees the task column; Core may use the help column), C = observer (ticks the feedback checklist). 1 minute preparation, about 3 minutes speaking, 1 minute feedback, then rotate.
 Task ! is the unexpected question: in the exam the candidate has not seen it — the examiner should read it without warning.
@@ -1243,7 +1251,11 @@
           <a:lstStyle/>
           <a:p>
             <a:r>
-              <a:rPr lang="en-US" dirty="0"/>
+              <a:rPr lang="ar-SA" dirty="0">
+                <a:latin typeface="Amiri" pitchFamily="2" charset="-78"/>
+                <a:ea typeface="Amiri" pitchFamily="2" charset="-78"/>
+                <a:cs typeface="Amiri" pitchFamily="2" charset="-78"/>
+              </a:rPr>
               <a:t>TOPIC CONVERSATION — Core. Examiner asks the questions in order and may add “لِمَاذَا؟ / هَلْ يُمْكِنُ أَنْ تَشْرَحَ أَكْثَرَ؟” to push for more. Candidate aims for one full sentence per question.
 </a:t>
             </a:r>
@@ -1332,7 +1344,11 @@
           <a:lstStyle/>
           <a:p>
             <a:r>
-              <a:rPr lang="en-US" dirty="0"/>
+              <a:rPr lang="ar-SA" dirty="0">
+                <a:latin typeface="Amiri" pitchFamily="2" charset="-78"/>
+                <a:ea typeface="Amiri" pitchFamily="2" charset="-78"/>
+                <a:cs typeface="Amiri" pitchFamily="2" charset="-78"/>
+              </a:rPr>
               <a:t>TOPIC CONVERSATION — Develop. Examiner asks the questions in order and may add “لِمَاذَا؟ / هَلْ يُمْكِنُ أَنْ تَشْرَحَ أَكْثَرَ؟” to push for more. Candidate aims for two or three sentences, with a comparison and a past detail.
 </a:t>
             </a:r>
@@ -1421,7 +1437,11 @@
           <a:lstStyle/>
           <a:p>
             <a:r>
-              <a:rPr lang="en-US" dirty="0"/>
+              <a:rPr lang="ar-SA" dirty="0">
+                <a:latin typeface="Amiri" pitchFamily="2" charset="-78"/>
+                <a:ea typeface="Amiri" pitchFamily="2" charset="-78"/>
+                <a:cs typeface="Amiri" pitchFamily="2" charset="-78"/>
+              </a:rPr>
               <a:t>TOPIC CONVERSATION — Stretch. Examiner asks the questions in order and may add “لِمَاذَا؟ / هَلْ يُمْكِنُ أَنْ تَشْرَحَ أَكْثَرَ؟” to push for more. Candidate aims for a developed answer: opinion, balance, concession and a conditional.
 </a:t>
             </a:r>
@@ -1510,7 +1530,11 @@
           <a:lstStyle/>
           <a:p>
             <a:r>
-              <a:rPr lang="en-US" dirty="0"/>
+              <a:rPr lang="ar-SA" dirty="0">
+                <a:latin typeface="Amiri" pitchFamily="2" charset="-78"/>
+                <a:ea typeface="Amiri" pitchFamily="2" charset="-78"/>
+                <a:cs typeface="Amiri" pitchFamily="2" charset="-78"/>
+              </a:rPr>
               <a:t>WELCOME (1 min) — while students join.
 • Greet each student by name as they arrive: السَّلَامُ عَلَيْكُمْ. Take the register (Pastoral Tracker: attendance 0/1).
 • 2-MINUTE CHECK-IN (SEND training): a private chat to any student who seemed unsettled last lesson — “Are you okay today? 👍 / 👎”.
@@ -2224,7 +2248,11 @@
           <a:lstStyle/>
           <a:p>
             <a:r>
-              <a:rPr lang="en-US" dirty="0"/>
+              <a:rPr lang="ar-SA" dirty="0">
+                <a:latin typeface="Amiri" pitchFamily="2" charset="-78"/>
+                <a:ea typeface="Amiri" pitchFamily="2" charset="-78"/>
+                <a:cs typeface="Amiri" pitchFamily="2" charset="-78"/>
+              </a:rPr>
               <a:t>TEACH (3 min). Role play = precise and complete; conversation = develop. Choral repetition of the repair phrases. To a girl: تُعِيدِي.</a:t>
             </a:r>
             <a:endParaRPr lang="en-US" dirty="0"/>
@@ -2312,7 +2340,11 @@
           <a:lstStyle/>
           <a:p>
             <a:r>
-              <a:rPr lang="en-US" dirty="0"/>
+              <a:rPr lang="ar-SA" dirty="0">
+                <a:latin typeface="Amiri" pitchFamily="2" charset="-78"/>
+                <a:ea typeface="Amiri" pitchFamily="2" charset="-78"/>
+                <a:cs typeface="Amiri" pitchFamily="2" charset="-78"/>
+              </a:rPr>
               <a:t>LANGUAGE BANK (2 min) — هٰذَا القَمِيصُ · ثَمَنُهُ عِشْرُونَ جُنَيْهًا. هٰذِهِ الحَقِيبَةُ · ثَمَنُهَا … The pronoun follows the noun’s gender. Non-human plurals: هٰذِهِ الأَحْذِيَةُ · ثَمَنُهَا … Comparatives: أَرْخَصُ مِنْ · أَغْلَى مِنْ.</a:t>
             </a:r>
             <a:endParaRPr lang="en-US" dirty="0"/>
@@ -2400,7 +2432,11 @@
           <a:lstStyle/>
           <a:p>
             <a:r>
-              <a:rPr lang="en-US" dirty="0"/>
+              <a:rPr lang="ar-SA" dirty="0">
+                <a:latin typeface="Amiri" pitchFamily="2" charset="-78"/>
+                <a:ea typeface="Amiri" pitchFamily="2" charset="-78"/>
+                <a:cs typeface="Amiri" pitchFamily="2" charset="-78"/>
+              </a:rPr>
               <a:t>LANGUAGE BANK (2 min) — اشْتَرَيْتُ هٰذَا … أَمْسِ، لٰكِنَّهُ مَكْسُورٌ / لَا يَعْمَلُ. أُرِيدُ أَنْ أُبَدِّلَهُ / أَنْ أَسْتَرِدَّ ثَمَنَهُ. Numbers: 11–99 + singular accusative (عِشْرُونَ جُنَيْهًا).</a:t>
             </a:r>
             <a:endParaRPr lang="en-US" dirty="0"/>
@@ -2576,7 +2612,11 @@
           <a:lstStyle/>
           <a:p>
             <a:r>
-              <a:rPr lang="en-US" dirty="0"/>
+              <a:rPr lang="ar-SA" dirty="0">
+                <a:latin typeface="Amiri" pitchFamily="2" charset="-78"/>
+                <a:ea typeface="Amiri" pitchFamily="2" charset="-78"/>
+                <a:cs typeface="Amiri" pitchFamily="2" charset="-78"/>
+              </a:rPr>
               <a:t>ROLE PLAY A (Core) — a clothes shop.
 SET-UP IN THE BREAKOUT ROOM: A = examiner (reads the left column ONLY — the questions, in order), B = candidate (sees the task column; Core may use the help column), C = observer (ticks the feedback checklist). 1 minute preparation, about 3 minutes speaking, 1 minute feedback, then rotate.
 Task ! is the unexpected question: in the exam the candidate has not seen it — the examiner should read it without warning.
@@ -2668,7 +2708,11 @@
           <a:lstStyle/>
           <a:p>
             <a:r>
-              <a:rPr lang="en-US" dirty="0"/>
+              <a:rPr lang="ar-SA" dirty="0">
+                <a:latin typeface="Amiri" pitchFamily="2" charset="-78"/>
+                <a:ea typeface="Amiri" pitchFamily="2" charset="-78"/>
+                <a:cs typeface="Amiri" pitchFamily="2" charset="-78"/>
+              </a:rPr>
               <a:t>ROLE PLAY B (Core+) — an electronics shop.
 SET-UP IN THE BREAKOUT ROOM: A = examiner (reads the left column ONLY — the questions, in order), B = candidate (sees the task column; Core may use the help column), C = observer (ticks the feedback checklist). 1 minute preparation, about 3 minutes speaking, 1 minute feedback, then rotate.
 Task ! is the unexpected question: in the exam the candidate has not seen it — the examiner should read it without warning.
@@ -3156,6 +3200,7 @@
                   <a:srgbClr val="D4AF37"/>
                 </a:solidFill>
                 <a:latin typeface="Amiri" pitchFamily="2" charset="-78"/>
+                <a:ea typeface="Amiri" pitchFamily="2" charset="-78"/>
                 <a:cs typeface="Amiri" pitchFamily="2" charset="-78"/>
               </a:rPr>
               <a:t>م</a:t>
@@ -3362,6 +3407,7 @@
                   <a:srgbClr val="D4AF37"/>
                 </a:solidFill>
                 <a:latin typeface="Amiri" pitchFamily="2" charset="-78"/>
+                <a:ea typeface="Amiri" pitchFamily="2" charset="-78"/>
                 <a:cs typeface="Amiri" pitchFamily="2" charset="-78"/>
               </a:rPr>
               <a:t>وَرْشَةُ التَّحَدُّثِ — التَّسَوُّقُ وَالأَسْعَارُ</a:t>
@@ -3413,6 +3459,7 @@
                   <a:srgbClr val="C6D2E6"/>
                 </a:solidFill>
                 <a:latin typeface="Amiri" pitchFamily="2" charset="-78"/>
+                <a:ea typeface="Amiri" pitchFamily="2" charset="-78"/>
                 <a:cs typeface="Amiri" pitchFamily="2" charset="-78"/>
               </a:rPr>
               <a:t>كَمْ ثَمَنُ هٰذَا؟</a:t>
@@ -3439,6 +3486,7 @@
                   <a:srgbClr val="C6D2E6"/>
                 </a:solidFill>
                 <a:latin typeface="Amiri" pitchFamily="2" charset="-78"/>
+                <a:ea typeface="Amiri" pitchFamily="2" charset="-78"/>
                 <a:cs typeface="Amiri" pitchFamily="2" charset="-78"/>
               </a:rPr>
               <a:t>ثَمَنُهَا</a:t>
@@ -3465,6 +3513,7 @@
                   <a:srgbClr val="C6D2E6"/>
                 </a:solidFill>
                 <a:latin typeface="Amiri" pitchFamily="2" charset="-78"/>
+                <a:ea typeface="Amiri" pitchFamily="2" charset="-78"/>
                 <a:cs typeface="Amiri" pitchFamily="2" charset="-78"/>
               </a:rPr>
               <a:t>أَرْخَصُ</a:t>
@@ -3491,6 +3540,7 @@
                   <a:srgbClr val="C6D2E6"/>
                 </a:solidFill>
                 <a:latin typeface="Amiri" pitchFamily="2" charset="-78"/>
+                <a:ea typeface="Amiri" pitchFamily="2" charset="-78"/>
                 <a:cs typeface="Amiri" pitchFamily="2" charset="-78"/>
               </a:rPr>
               <a:t>أَغْلَى</a:t>
@@ -3517,6 +3567,7 @@
                   <a:srgbClr val="C6D2E6"/>
                 </a:solidFill>
                 <a:latin typeface="Amiri" pitchFamily="2" charset="-78"/>
+                <a:ea typeface="Amiri" pitchFamily="2" charset="-78"/>
                 <a:cs typeface="Amiri" pitchFamily="2" charset="-78"/>
               </a:rPr>
               <a:t>أَفْضَلُ</a:t>
@@ -3949,6 +4000,7 @@
                   <a:srgbClr val="D4AF37"/>
                 </a:solidFill>
                 <a:latin typeface="Amiri" pitchFamily="2" charset="-78"/>
+                <a:ea typeface="Amiri" pitchFamily="2" charset="-78"/>
                 <a:cs typeface="Amiri" pitchFamily="2" charset="-78"/>
               </a:rPr>
               <a:t>م</a:t>
@@ -4269,6 +4321,7 @@
                   <a:srgbClr val="8A6D1E"/>
                 </a:solidFill>
                 <a:latin typeface="Amiri" pitchFamily="2" charset="-78"/>
+                <a:ea typeface="Amiri" pitchFamily="2" charset="-78"/>
                 <a:cs typeface="Amiri" pitchFamily="2" charset="-78"/>
               </a:rPr>
               <a:t>إِرْجَاعُ بِضَاعَةٍ مَعِيبَةٍ</a:t>
@@ -4549,6 +4602,7 @@
                   <a:srgbClr val="1B3B6F"/>
                 </a:solidFill>
                 <a:latin typeface="Amiri" pitchFamily="2" charset="-78"/>
+                <a:ea typeface="Amiri" pitchFamily="2" charset="-78"/>
                 <a:cs typeface="Amiri" pitchFamily="2" charset="-78"/>
               </a:rPr>
               <a:t>اشْتَرَيْتُ … مِنْ هُنَا قَبْلَ …</a:t>
@@ -4625,6 +4679,7 @@
                   <a:srgbClr val="1B3B6F"/>
                 </a:solidFill>
                 <a:latin typeface="Amiri" pitchFamily="2" charset="-78"/>
+                <a:ea typeface="Amiri" pitchFamily="2" charset="-78"/>
                 <a:cs typeface="Amiri" pitchFamily="2" charset="-78"/>
               </a:rPr>
               <a:t>تَفَضَّلْ، كَيْفَ أَخْدُمُكَ؟</a:t>
@@ -4728,6 +4783,7 @@
                   <a:srgbClr val="1B3B6F"/>
                 </a:solidFill>
                 <a:latin typeface="Amiri" pitchFamily="2" charset="-78"/>
+                <a:ea typeface="Amiri" pitchFamily="2" charset="-78"/>
                 <a:cs typeface="Amiri" pitchFamily="2" charset="-78"/>
               </a:rPr>
               <a:t>الشَّاشَةُ … وَالبَطَّارِيَّةُ لَا …</a:t>
@@ -4804,6 +4860,7 @@
                   <a:srgbClr val="1B3B6F"/>
                 </a:solidFill>
                 <a:latin typeface="Amiri" pitchFamily="2" charset="-78"/>
+                <a:ea typeface="Amiri" pitchFamily="2" charset="-78"/>
                 <a:cs typeface="Amiri" pitchFamily="2" charset="-78"/>
               </a:rPr>
               <a:t>وَمَا المُشْكِلَةُ؟</a:t>
@@ -4907,6 +4964,7 @@
                   <a:srgbClr val="1B3B6F"/>
                 </a:solidFill>
                 <a:latin typeface="Amiri" pitchFamily="2" charset="-78"/>
+                <a:ea typeface="Amiri" pitchFamily="2" charset="-78"/>
                 <a:cs typeface="Amiri" pitchFamily="2" charset="-78"/>
               </a:rPr>
               <a:t>نَعَمْ، تَفَضَّلْ. دَفَعْتُ …</a:t>
@@ -4983,6 +5041,7 @@
                   <a:srgbClr val="1B3B6F"/>
                 </a:solidFill>
                 <a:latin typeface="Amiri" pitchFamily="2" charset="-78"/>
+                <a:ea typeface="Amiri" pitchFamily="2" charset="-78"/>
                 <a:cs typeface="Amiri" pitchFamily="2" charset="-78"/>
               </a:rPr>
               <a:t>هَلْ مَعَكَ الإِيصَالُ؟</a:t>
@@ -5086,6 +5145,7 @@
                   <a:srgbClr val="1B3B6F"/>
                 </a:solidFill>
                 <a:latin typeface="Amiri" pitchFamily="2" charset="-78"/>
+                <a:ea typeface="Amiri" pitchFamily="2" charset="-78"/>
                 <a:cs typeface="Amiri" pitchFamily="2" charset="-78"/>
               </a:rPr>
               <a:t>أُفَضِّلُ أَنْ … لِأَنَّ …</a:t>
@@ -5162,6 +5222,7 @@
                   <a:srgbClr val="1B3B6F"/>
                 </a:solidFill>
                 <a:latin typeface="Amiri" pitchFamily="2" charset="-78"/>
+                <a:ea typeface="Amiri" pitchFamily="2" charset="-78"/>
                 <a:cs typeface="Amiri" pitchFamily="2" charset="-78"/>
               </a:rPr>
               <a:t>نَسْتَطِيعُ أَنْ نُصْلِحَهَا فِي أُسْبُوعَيْنِ.</a:t>
@@ -5265,6 +5326,7 @@
                   <a:srgbClr val="1B3B6F"/>
                 </a:solidFill>
                 <a:latin typeface="Amiri" pitchFamily="2" charset="-78"/>
+                <a:ea typeface="Amiri" pitchFamily="2" charset="-78"/>
                 <a:cs typeface="Amiri" pitchFamily="2" charset="-78"/>
               </a:rPr>
               <a:t>إِذَا لَمْ تَكُنْ عِنْدَكُمْ، فَأُرِيدُ أَنْ …</a:t>
@@ -5341,6 +5403,7 @@
                   <a:srgbClr val="1B3B6F"/>
                 </a:solidFill>
                 <a:latin typeface="Amiri" pitchFamily="2" charset="-78"/>
+                <a:ea typeface="Amiri" pitchFamily="2" charset="-78"/>
                 <a:cs typeface="Amiri" pitchFamily="2" charset="-78"/>
               </a:rPr>
               <a:t>وَإِذَا لَمْ تَكُنْ عِنْدَنَا سَاعَةٌ أُخْرَى؟</a:t>
@@ -5550,6 +5613,7 @@
                   <a:srgbClr val="D4AF37"/>
                 </a:solidFill>
                 <a:latin typeface="Amiri" pitchFamily="2" charset="-78"/>
+                <a:ea typeface="Amiri" pitchFamily="2" charset="-78"/>
                 <a:cs typeface="Amiri" pitchFamily="2" charset="-78"/>
               </a:rPr>
               <a:t>م</a:t>
@@ -5870,6 +5934,7 @@
                   <a:srgbClr val="8A6D1E"/>
                 </a:solidFill>
                 <a:latin typeface="Amiri" pitchFamily="2" charset="-78"/>
+                <a:ea typeface="Amiri" pitchFamily="2" charset="-78"/>
                 <a:cs typeface="Amiri" pitchFamily="2" charset="-78"/>
               </a:rPr>
               <a:t>المُوضَةُ السَّرِيعَةُ</a:t>
@@ -6150,6 +6215,7 @@
                   <a:srgbClr val="1B3B6F"/>
                 </a:solidFill>
                 <a:latin typeface="Amiri" pitchFamily="2" charset="-78"/>
+                <a:ea typeface="Amiri" pitchFamily="2" charset="-78"/>
                 <a:cs typeface="Amiri" pitchFamily="2" charset="-78"/>
               </a:rPr>
               <a:t>لِأَنَّهَا … كَمَا أَنَّ …</a:t>
@@ -6226,6 +6292,7 @@
                   <a:srgbClr val="1B3B6F"/>
                 </a:solidFill>
                 <a:latin typeface="Amiri" pitchFamily="2" charset="-78"/>
+                <a:ea typeface="Amiri" pitchFamily="2" charset="-78"/>
                 <a:cs typeface="Amiri" pitchFamily="2" charset="-78"/>
               </a:rPr>
               <a:t>لِمَاذَا يُحِبُّ المُرَاهِقُونَ المَلَابِسَ الرَّخِيصَةَ؟</a:t>
@@ -6329,6 +6396,7 @@
                   <a:srgbClr val="1B3B6F"/>
                 </a:solidFill>
                 <a:latin typeface="Amiri" pitchFamily="2" charset="-78"/>
+                <a:ea typeface="Amiri" pitchFamily="2" charset="-78"/>
                 <a:cs typeface="Amiri" pitchFamily="2" charset="-78"/>
               </a:rPr>
               <a:t>تُصْنَعُ … مِمَّا يُؤَدِّي إِلَى …</a:t>
@@ -6405,6 +6473,7 @@
                   <a:srgbClr val="1B3B6F"/>
                 </a:solidFill>
                 <a:latin typeface="Amiri" pitchFamily="2" charset="-78"/>
+                <a:ea typeface="Amiri" pitchFamily="2" charset="-78"/>
                 <a:cs typeface="Amiri" pitchFamily="2" charset="-78"/>
               </a:rPr>
               <a:t>وَمَا المُشْكِلَةُ فِي ذٰلِكَ؟</a:t>
@@ -6508,6 +6577,7 @@
                   <a:srgbClr val="1B3B6F"/>
                 </a:solidFill>
                 <a:latin typeface="Amiri" pitchFamily="2" charset="-78"/>
+                <a:ea typeface="Amiri" pitchFamily="2" charset="-78"/>
                 <a:cs typeface="Amiri" pitchFamily="2" charset="-78"/>
               </a:rPr>
               <a:t>كُنْتُ أَشْتَرِي … أَمَّا الآنَ فَأَشْتَرِي …</a:t>
@@ -6584,6 +6654,7 @@
                   <a:srgbClr val="1B3B6F"/>
                 </a:solidFill>
                 <a:latin typeface="Amiri" pitchFamily="2" charset="-78"/>
+                <a:ea typeface="Amiri" pitchFamily="2" charset="-78"/>
                 <a:cs typeface="Amiri" pitchFamily="2" charset="-78"/>
               </a:rPr>
               <a:t>هَلْ غَيَّرْتَ أَنْتَ عَادَاتِكَ؟</a:t>
@@ -6687,6 +6758,7 @@
                   <a:srgbClr val="1B3B6F"/>
                 </a:solidFill>
                 <a:latin typeface="Amiri" pitchFamily="2" charset="-78"/>
+                <a:ea typeface="Amiri" pitchFamily="2" charset="-78"/>
                 <a:cs typeface="Amiri" pitchFamily="2" charset="-78"/>
               </a:rPr>
               <a:t>صَحِيحٌ أَنَّ … غَيْرَ أَنَّ …</a:t>
@@ -6763,6 +6835,7 @@
                   <a:srgbClr val="1B3B6F"/>
                 </a:solidFill>
                 <a:latin typeface="Amiri" pitchFamily="2" charset="-78"/>
+                <a:ea typeface="Amiri" pitchFamily="2" charset="-78"/>
                 <a:cs typeface="Amiri" pitchFamily="2" charset="-78"/>
               </a:rPr>
               <a:t>لٰكِنَّ المَلَابِسَ الجَيِّدَةَ غَالِيَةٌ جِدًّا!</a:t>
@@ -6866,6 +6939,7 @@
                   <a:srgbClr val="1B3B6F"/>
                 </a:solidFill>
                 <a:latin typeface="Amiri" pitchFamily="2" charset="-78"/>
+                <a:ea typeface="Amiri" pitchFamily="2" charset="-78"/>
                 <a:cs typeface="Amiri" pitchFamily="2" charset="-78"/>
               </a:rPr>
               <a:t>لَوْ أُعْطِيتُ …، لَادَّخَرْتُ …</a:t>
@@ -6942,6 +7016,7 @@
                   <a:srgbClr val="1B3B6F"/>
                 </a:solidFill>
                 <a:latin typeface="Amiri" pitchFamily="2" charset="-78"/>
+                <a:ea typeface="Amiri" pitchFamily="2" charset="-78"/>
                 <a:cs typeface="Amiri" pitchFamily="2" charset="-78"/>
               </a:rPr>
               <a:t>لَوْ أُعْطِيتَ مِئَةَ جُنَيْهٍ الآنَ، فِيمَ تُنْفِقُهَا؟</a:t>
@@ -7151,6 +7226,7 @@
                   <a:srgbClr val="D4AF37"/>
                 </a:solidFill>
                 <a:latin typeface="Amiri" pitchFamily="2" charset="-78"/>
+                <a:ea typeface="Amiri" pitchFamily="2" charset="-78"/>
                 <a:cs typeface="Amiri" pitchFamily="2" charset="-78"/>
               </a:rPr>
               <a:t>م</a:t>
@@ -7471,6 +7547,7 @@
                   <a:srgbClr val="8A6D1E"/>
                 </a:solidFill>
                 <a:latin typeface="Amiri" pitchFamily="2" charset="-78"/>
+                <a:ea typeface="Amiri" pitchFamily="2" charset="-78"/>
                 <a:cs typeface="Amiri" pitchFamily="2" charset="-78"/>
               </a:rPr>
               <a:t>وَرَقَةُ المُلَاحِظِ</a:t>
@@ -8941,6 +9018,7 @@
                   <a:srgbClr val="D4AF37"/>
                 </a:solidFill>
                 <a:latin typeface="Amiri" pitchFamily="2" charset="-78"/>
+                <a:ea typeface="Amiri" pitchFamily="2" charset="-78"/>
                 <a:cs typeface="Amiri" pitchFamily="2" charset="-78"/>
               </a:rPr>
               <a:t>م</a:t>
@@ -9261,6 +9339,7 @@
                   <a:srgbClr val="8A6D1E"/>
                 </a:solidFill>
                 <a:latin typeface="Amiri" pitchFamily="2" charset="-78"/>
+                <a:ea typeface="Amiri" pitchFamily="2" charset="-78"/>
                 <a:cs typeface="Amiri" pitchFamily="2" charset="-78"/>
               </a:rPr>
               <a:t>نَمُوذَجُ الإِجَابَةِ</a:t>
@@ -9503,6 +9582,7 @@
                   <a:srgbClr val="1B3B6F"/>
                 </a:solidFill>
                 <a:latin typeface="Amiri" pitchFamily="2" charset="-78"/>
+                <a:ea typeface="Amiri" pitchFamily="2" charset="-78"/>
                 <a:cs typeface="Amiri" pitchFamily="2" charset="-78"/>
               </a:rPr>
               <a:t>أَبْحَثُ عَنْ كَنْزَةٍ زَرْقَاءَ.</a:t>
@@ -9579,6 +9659,7 @@
                   <a:srgbClr val="1B3B6F"/>
                 </a:solidFill>
                 <a:latin typeface="Amiri" pitchFamily="2" charset="-78"/>
+                <a:ea typeface="Amiri" pitchFamily="2" charset="-78"/>
                 <a:cs typeface="Amiri" pitchFamily="2" charset="-78"/>
               </a:rPr>
               <a:t>أَهْلًا، هَلْ أُسَاعِدُكَ؟</a:t>
@@ -9682,6 +9763,7 @@
                   <a:srgbClr val="1B3B6F"/>
                 </a:solidFill>
                 <a:latin typeface="Amiri" pitchFamily="2" charset="-78"/>
+                <a:ea typeface="Amiri" pitchFamily="2" charset="-78"/>
                 <a:cs typeface="Amiri" pitchFamily="2" charset="-78"/>
               </a:rPr>
               <a:t>مَقَاسِي مُتَوَسِّطٌ.</a:t>
@@ -9758,6 +9840,7 @@
                   <a:srgbClr val="1B3B6F"/>
                 </a:solidFill>
                 <a:latin typeface="Amiri" pitchFamily="2" charset="-78"/>
+                <a:ea typeface="Amiri" pitchFamily="2" charset="-78"/>
                 <a:cs typeface="Amiri" pitchFamily="2" charset="-78"/>
               </a:rPr>
               <a:t>مَا مَقَاسُكَ؟</a:t>
@@ -9861,6 +9944,7 @@
                   <a:srgbClr val="1B3B6F"/>
                 </a:solidFill>
                 <a:latin typeface="Amiri" pitchFamily="2" charset="-78"/>
+                <a:ea typeface="Amiri" pitchFamily="2" charset="-78"/>
                 <a:cs typeface="Amiri" pitchFamily="2" charset="-78"/>
               </a:rPr>
               <a:t>كَمْ ثَمَنُهَا مِنْ فَضْلِكَ؟</a:t>
@@ -9937,6 +10021,7 @@
                   <a:srgbClr val="1B3B6F"/>
                 </a:solidFill>
                 <a:latin typeface="Amiri" pitchFamily="2" charset="-78"/>
+                <a:ea typeface="Amiri" pitchFamily="2" charset="-78"/>
                 <a:cs typeface="Amiri" pitchFamily="2" charset="-78"/>
               </a:rPr>
               <a:t>تَفَضَّلْ، هٰذِهِ الكَنْزَةُ جَمِيلَةٌ.</a:t>
@@ -10040,6 +10125,7 @@
                   <a:srgbClr val="1B3B6F"/>
                 </a:solidFill>
                 <a:latin typeface="Amiri" pitchFamily="2" charset="-78"/>
+                <a:ea typeface="Amiri" pitchFamily="2" charset="-78"/>
                 <a:cs typeface="Amiri" pitchFamily="2" charset="-78"/>
               </a:rPr>
               <a:t>هِيَ غَالِيَةٌ قَلِيلًا. هَلْ عِنْدَكَ كَنْزَةٌ أَرْخَصُ؟</a:t>
@@ -10116,6 +10202,7 @@
                   <a:srgbClr val="1B3B6F"/>
                 </a:solidFill>
                 <a:latin typeface="Amiri" pitchFamily="2" charset="-78"/>
+                <a:ea typeface="Amiri" pitchFamily="2" charset="-78"/>
                 <a:cs typeface="Amiri" pitchFamily="2" charset="-78"/>
               </a:rPr>
               <a:t>ثَمَنُهَا ثَلَاثُونَ جُنَيْهًا.</a:t>
@@ -10219,6 +10306,7 @@
                   <a:srgbClr val="1B3B6F"/>
                 </a:solidFill>
                 <a:latin typeface="Amiri" pitchFamily="2" charset="-78"/>
+                <a:ea typeface="Amiri" pitchFamily="2" charset="-78"/>
                 <a:cs typeface="Amiri" pitchFamily="2" charset="-78"/>
               </a:rPr>
               <a:t>سَأَدْفَعُ بِالبِطَاقَةِ، مِنْ فَضْلِكَ.</a:t>
@@ -10295,6 +10383,7 @@
                   <a:srgbClr val="1B3B6F"/>
                 </a:solidFill>
                 <a:latin typeface="Amiri" pitchFamily="2" charset="-78"/>
+                <a:ea typeface="Amiri" pitchFamily="2" charset="-78"/>
                 <a:cs typeface="Amiri" pitchFamily="2" charset="-78"/>
               </a:rPr>
               <a:t>كَيْفَ تُرِيدُ أَنْ تَدْفَعَ؟</a:t>
@@ -10504,6 +10593,7 @@
                   <a:srgbClr val="D4AF37"/>
                 </a:solidFill>
                 <a:latin typeface="Amiri" pitchFamily="2" charset="-78"/>
+                <a:ea typeface="Amiri" pitchFamily="2" charset="-78"/>
                 <a:cs typeface="Amiri" pitchFamily="2" charset="-78"/>
               </a:rPr>
               <a:t>م</a:t>
@@ -10824,6 +10914,7 @@
                   <a:srgbClr val="8A6D1E"/>
                 </a:solidFill>
                 <a:latin typeface="Amiri" pitchFamily="2" charset="-78"/>
+                <a:ea typeface="Amiri" pitchFamily="2" charset="-78"/>
                 <a:cs typeface="Amiri" pitchFamily="2" charset="-78"/>
               </a:rPr>
               <a:t>نَمُوذَجُ الإِجَابَةِ</a:t>
@@ -11066,6 +11157,7 @@
                   <a:srgbClr val="1B3B6F"/>
                 </a:solidFill>
                 <a:latin typeface="Amiri" pitchFamily="2" charset="-78"/>
+                <a:ea typeface="Amiri" pitchFamily="2" charset="-78"/>
                 <a:cs typeface="Amiri" pitchFamily="2" charset="-78"/>
               </a:rPr>
               <a:t>أَحْتَاجُ إِلَى سَمَّاعَاتٍ لِلدِّرَاسَةِ عَلَى الإِنْتَرْنِتِ.</a:t>
@@ -11142,6 +11234,7 @@
                   <a:srgbClr val="1B3B6F"/>
                 </a:solidFill>
                 <a:latin typeface="Amiri" pitchFamily="2" charset="-78"/>
+                <a:ea typeface="Amiri" pitchFamily="2" charset="-78"/>
                 <a:cs typeface="Amiri" pitchFamily="2" charset="-78"/>
               </a:rPr>
               <a:t>نَعَمْ؟ مَاذَا تَحْتَاجُ؟</a:t>
@@ -11245,6 +11338,7 @@
                   <a:srgbClr val="1B3B6F"/>
                 </a:solidFill>
                 <a:latin typeface="Amiri" pitchFamily="2" charset="-78"/>
+                <a:ea typeface="Amiri" pitchFamily="2" charset="-78"/>
                 <a:cs typeface="Amiri" pitchFamily="2" charset="-78"/>
               </a:rPr>
               <a:t>مَا الفَرْقُ بَيْنَهُمَا؟</a:t>
@@ -11321,6 +11415,7 @@
                   <a:srgbClr val="1B3B6F"/>
                 </a:solidFill>
                 <a:latin typeface="Amiri" pitchFamily="2" charset="-78"/>
+                <a:ea typeface="Amiri" pitchFamily="2" charset="-78"/>
                 <a:cs typeface="Amiri" pitchFamily="2" charset="-78"/>
               </a:rPr>
               <a:t>عِنْدَنَا هٰذِهِ بِأَرْبَعِينَ، وَهٰذِهِ بِسَبْعِينَ جُنَيْهًا.</a:t>
@@ -11424,6 +11519,7 @@
                   <a:srgbClr val="1B3B6F"/>
                 </a:solidFill>
                 <a:latin typeface="Amiri" pitchFamily="2" charset="-78"/>
+                <a:ea typeface="Amiri" pitchFamily="2" charset="-78"/>
                 <a:cs typeface="Amiri" pitchFamily="2" charset="-78"/>
               </a:rPr>
               <a:t>هَلْ لَهَا ضَمَانٌ؟ وَكَمْ سَنَةً؟</a:t>
@@ -11500,6 +11596,7 @@
                   <a:srgbClr val="1B3B6F"/>
                 </a:solidFill>
                 <a:latin typeface="Amiri" pitchFamily="2" charset="-78"/>
+                <a:ea typeface="Amiri" pitchFamily="2" charset="-78"/>
                 <a:cs typeface="Amiri" pitchFamily="2" charset="-78"/>
               </a:rPr>
               <a:t>الغَالِيَةُ لَاسِلْكِيَّةٌ، وَصَوْتُهَا أَنْقَى.</a:t>
@@ -11603,6 +11700,7 @@
                   <a:srgbClr val="1B3B6F"/>
                 </a:solidFill>
                 <a:latin typeface="Amiri" pitchFamily="2" charset="-78"/>
+                <a:ea typeface="Amiri" pitchFamily="2" charset="-78"/>
                 <a:cs typeface="Amiri" pitchFamily="2" charset="-78"/>
               </a:rPr>
               <a:t>سَآخُذُ الغَالِيَةَ، لِأَنَّهَا أَفْضَلُ وَأَطْوَلُ ضَمَانًا، وَسَأَسْتَخْدِمُهَا كُلَّ يَوْمٍ.</a:t>
@@ -11679,6 +11777,7 @@
                   <a:srgbClr val="1B3B6F"/>
                 </a:solidFill>
                 <a:latin typeface="Amiri" pitchFamily="2" charset="-78"/>
+                <a:ea typeface="Amiri" pitchFamily="2" charset="-78"/>
                 <a:cs typeface="Amiri" pitchFamily="2" charset="-78"/>
               </a:rPr>
               <a:t>سَنَتَانِ لِلْغَالِيَةِ، وَسَنَةٌ لِلرَّخِيصَةِ.</a:t>
@@ -11782,6 +11881,7 @@
                   <a:srgbClr val="1B3B6F"/>
                 </a:solidFill>
                 <a:latin typeface="Amiri" pitchFamily="2" charset="-78"/>
+                <a:ea typeface="Amiri" pitchFamily="2" charset="-78"/>
                 <a:cs typeface="Amiri" pitchFamily="2" charset="-78"/>
               </a:rPr>
               <a:t>أَحْيَانًا، لٰكِنِّي أُفَضِّلُ المَحَلَّ، لِأَنِّي أَسْتَطِيعُ أَنْ أُجَرِّبَ قَبْلَ أَنْ أَشْتَرِيَ.</a:t>
@@ -11858,6 +11958,7 @@
                   <a:srgbClr val="1B3B6F"/>
                 </a:solidFill>
                 <a:latin typeface="Amiri" pitchFamily="2" charset="-78"/>
+                <a:ea typeface="Amiri" pitchFamily="2" charset="-78"/>
                 <a:cs typeface="Amiri" pitchFamily="2" charset="-78"/>
               </a:rPr>
               <a:t>هَلْ تَشْتَرِي الأَجْهِزَةَ عَلَى الإِنْتَرْنِتِ عَادَةً؟</a:t>
@@ -12067,6 +12168,7 @@
                   <a:srgbClr val="D4AF37"/>
                 </a:solidFill>
                 <a:latin typeface="Amiri" pitchFamily="2" charset="-78"/>
+                <a:ea typeface="Amiri" pitchFamily="2" charset="-78"/>
                 <a:cs typeface="Amiri" pitchFamily="2" charset="-78"/>
               </a:rPr>
               <a:t>م</a:t>
@@ -12387,6 +12489,7 @@
                   <a:srgbClr val="8A6D1E"/>
                 </a:solidFill>
                 <a:latin typeface="Amiri" pitchFamily="2" charset="-78"/>
+                <a:ea typeface="Amiri" pitchFamily="2" charset="-78"/>
                 <a:cs typeface="Amiri" pitchFamily="2" charset="-78"/>
               </a:rPr>
               <a:t>نَمُوذَجُ الإِجَابَةِ</a:t>
@@ -12629,6 +12732,7 @@
                   <a:srgbClr val="1B3B6F"/>
                 </a:solidFill>
                 <a:latin typeface="Amiri" pitchFamily="2" charset="-78"/>
+                <a:ea typeface="Amiri" pitchFamily="2" charset="-78"/>
                 <a:cs typeface="Amiri" pitchFamily="2" charset="-78"/>
               </a:rPr>
               <a:t>اشْتَرَيْتُ هٰذِهِ السَّاعَةَ الذَّكِيَّةَ مِنْ هُنَا قَبْلَ ثَلَاثَةِ أَيَّامٍ.</a:t>
@@ -12705,6 +12809,7 @@
                   <a:srgbClr val="1B3B6F"/>
                 </a:solidFill>
                 <a:latin typeface="Amiri" pitchFamily="2" charset="-78"/>
+                <a:ea typeface="Amiri" pitchFamily="2" charset="-78"/>
                 <a:cs typeface="Amiri" pitchFamily="2" charset="-78"/>
               </a:rPr>
               <a:t>تَفَضَّلْ، كَيْفَ أَخْدُمُكَ؟</a:t>
@@ -12808,6 +12913,7 @@
                   <a:srgbClr val="1B3B6F"/>
                 </a:solidFill>
                 <a:latin typeface="Amiri" pitchFamily="2" charset="-78"/>
+                <a:ea typeface="Amiri" pitchFamily="2" charset="-78"/>
                 <a:cs typeface="Amiri" pitchFamily="2" charset="-78"/>
               </a:rPr>
               <a:t>الشَّاشَةُ تَنْطَفِئُ وَحْدَهَا، وَالبَطَّارِيَّةُ لَا تَدُومُ أَكْثَرَ مِنْ سَاعَتَيْنِ.</a:t>
@@ -12884,6 +12990,7 @@
                   <a:srgbClr val="1B3B6F"/>
                 </a:solidFill>
                 <a:latin typeface="Amiri" pitchFamily="2" charset="-78"/>
+                <a:ea typeface="Amiri" pitchFamily="2" charset="-78"/>
                 <a:cs typeface="Amiri" pitchFamily="2" charset="-78"/>
               </a:rPr>
               <a:t>وَمَا المُشْكِلَةُ؟</a:t>
@@ -12987,6 +13094,7 @@
                   <a:srgbClr val="1B3B6F"/>
                 </a:solidFill>
                 <a:latin typeface="Amiri" pitchFamily="2" charset="-78"/>
+                <a:ea typeface="Amiri" pitchFamily="2" charset="-78"/>
                 <a:cs typeface="Amiri" pitchFamily="2" charset="-78"/>
               </a:rPr>
               <a:t>نَعَمْ، تَفَضَّلْ. دَفَعْتُ بِالبِطَاقَةِ، وَالثَّمَنُ مَكْتُوبٌ هُنَا: تِسْعُونَ جُنَيْهًا.</a:t>
@@ -13063,6 +13171,7 @@
                   <a:srgbClr val="1B3B6F"/>
                 </a:solidFill>
                 <a:latin typeface="Amiri" pitchFamily="2" charset="-78"/>
+                <a:ea typeface="Amiri" pitchFamily="2" charset="-78"/>
                 <a:cs typeface="Amiri" pitchFamily="2" charset="-78"/>
               </a:rPr>
               <a:t>هَلْ مَعَكَ الإِيصَالُ؟</a:t>
@@ -13166,6 +13275,7 @@
                   <a:srgbClr val="1B3B6F"/>
                 </a:solidFill>
                 <a:latin typeface="Amiri" pitchFamily="2" charset="-78"/>
+                <a:ea typeface="Amiri" pitchFamily="2" charset="-78"/>
                 <a:cs typeface="Amiri" pitchFamily="2" charset="-78"/>
               </a:rPr>
               <a:t>أُفَضِّلُ أَنْ أُبَدِّلَهَا بِسَاعَةٍ جَدِيدَةٍ، لِأَنِّي اشْتَرَيْتُهَا هَدِيَّةً لِعِيدِ مِيلَادِ أَخِي يَوْمَ السَّبْتِ.</a:t>
@@ -13242,6 +13352,7 @@
                   <a:srgbClr val="1B3B6F"/>
                 </a:solidFill>
                 <a:latin typeface="Amiri" pitchFamily="2" charset="-78"/>
+                <a:ea typeface="Amiri" pitchFamily="2" charset="-78"/>
                 <a:cs typeface="Amiri" pitchFamily="2" charset="-78"/>
               </a:rPr>
               <a:t>نَسْتَطِيعُ أَنْ نُصْلِحَهَا فِي أُسْبُوعَيْنِ.</a:t>
@@ -13345,6 +13456,7 @@
                   <a:srgbClr val="1B3B6F"/>
                 </a:solidFill>
                 <a:latin typeface="Amiri" pitchFamily="2" charset="-78"/>
+                <a:ea typeface="Amiri" pitchFamily="2" charset="-78"/>
                 <a:cs typeface="Amiri" pitchFamily="2" charset="-78"/>
               </a:rPr>
               <a:t>إِذَا لَمْ تَكُنْ عِنْدَكُمْ، فَأُرِيدُ أَنْ أَسْتَرِدَّ ثَمَنَهَا كَامِلًا، مِنْ فَضْلِكَ.</a:t>
@@ -13421,6 +13533,7 @@
                   <a:srgbClr val="1B3B6F"/>
                 </a:solidFill>
                 <a:latin typeface="Amiri" pitchFamily="2" charset="-78"/>
+                <a:ea typeface="Amiri" pitchFamily="2" charset="-78"/>
                 <a:cs typeface="Amiri" pitchFamily="2" charset="-78"/>
               </a:rPr>
               <a:t>وَإِذَا لَمْ تَكُنْ عِنْدَنَا سَاعَةٌ أُخْرَى؟</a:t>
@@ -13630,6 +13743,7 @@
                   <a:srgbClr val="D4AF37"/>
                 </a:solidFill>
                 <a:latin typeface="Amiri" pitchFamily="2" charset="-78"/>
+                <a:ea typeface="Amiri" pitchFamily="2" charset="-78"/>
                 <a:cs typeface="Amiri" pitchFamily="2" charset="-78"/>
               </a:rPr>
               <a:t>م</a:t>
@@ -13950,6 +14064,7 @@
                   <a:srgbClr val="8A6D1E"/>
                 </a:solidFill>
                 <a:latin typeface="Amiri" pitchFamily="2" charset="-78"/>
+                <a:ea typeface="Amiri" pitchFamily="2" charset="-78"/>
                 <a:cs typeface="Amiri" pitchFamily="2" charset="-78"/>
               </a:rPr>
               <a:t>نَمُوذَجُ الإِجَابَةِ</a:t>
@@ -14192,6 +14307,7 @@
                   <a:srgbClr val="1B3B6F"/>
                 </a:solidFill>
                 <a:latin typeface="Amiri" pitchFamily="2" charset="-78"/>
+                <a:ea typeface="Amiri" pitchFamily="2" charset="-78"/>
                 <a:cs typeface="Amiri" pitchFamily="2" charset="-78"/>
               </a:rPr>
               <a:t>لِأَنَّهَا تُنَاسِبُ مَصْرُوفَهُمُ القَلِيلَ، كَمَا أَنَّ المُوضَةَ تَتَغَيَّرُ بِسُرْعَةٍ عَلَى وَسَائِلِ التَّوَاصُلِ.</a:t>
@@ -14268,6 +14384,7 @@
                   <a:srgbClr val="1B3B6F"/>
                 </a:solidFill>
                 <a:latin typeface="Amiri" pitchFamily="2" charset="-78"/>
+                <a:ea typeface="Amiri" pitchFamily="2" charset="-78"/>
                 <a:cs typeface="Amiri" pitchFamily="2" charset="-78"/>
               </a:rPr>
               <a:t>لِمَاذَا يُحِبُّ المُرَاهِقُونَ المَلَابِسَ الرَّخِيصَةَ؟</a:t>
@@ -14371,6 +14488,7 @@
                   <a:srgbClr val="1B3B6F"/>
                 </a:solidFill>
                 <a:latin typeface="Amiri" pitchFamily="2" charset="-78"/>
+                <a:ea typeface="Amiri" pitchFamily="2" charset="-78"/>
                 <a:cs typeface="Amiri" pitchFamily="2" charset="-78"/>
               </a:rPr>
               <a:t>تُصْنَعُ بِكَمِّيَّاتٍ ضَخْمَةٍ وَتُرْمَى بَعْدَ أَشْهُرٍ، مِمَّا يُؤَدِّي إِلَى جِبَالٍ مِنَ النُّفَايَاتِ.</a:t>
@@ -14447,6 +14565,7 @@
                   <a:srgbClr val="1B3B6F"/>
                 </a:solidFill>
                 <a:latin typeface="Amiri" pitchFamily="2" charset="-78"/>
+                <a:ea typeface="Amiri" pitchFamily="2" charset="-78"/>
                 <a:cs typeface="Amiri" pitchFamily="2" charset="-78"/>
               </a:rPr>
               <a:t>وَمَا المُشْكِلَةُ فِي ذٰلِكَ؟</a:t>
@@ -14550,6 +14669,7 @@
                   <a:srgbClr val="1B3B6F"/>
                 </a:solidFill>
                 <a:latin typeface="Amiri" pitchFamily="2" charset="-78"/>
+                <a:ea typeface="Amiri" pitchFamily="2" charset="-78"/>
                 <a:cs typeface="Amiri" pitchFamily="2" charset="-78"/>
               </a:rPr>
               <a:t>كُنْتُ أَشْتَرِي قِطْعَةً جَدِيدَةً كُلَّ أُسْبُوعٍ، أَمَّا الآنَ فَأَشْتَرِي أَقَلَّ، وَأَخْتَارُ الجَوْدَةَ، أَوْ أَشْتَرِي مِنْ مَحَلَّاتِ المَلَابِسِ المُسْتَعْمَلَةِ.</a:t>
@@ -14626,6 +14746,7 @@
                   <a:srgbClr val="1B3B6F"/>
                 </a:solidFill>
                 <a:latin typeface="Amiri" pitchFamily="2" charset="-78"/>
+                <a:ea typeface="Amiri" pitchFamily="2" charset="-78"/>
                 <a:cs typeface="Amiri" pitchFamily="2" charset="-78"/>
               </a:rPr>
               <a:t>هَلْ غَيَّرْتَ أَنْتَ عَادَاتِكَ؟</a:t>
@@ -14729,6 +14850,7 @@
                   <a:srgbClr val="1B3B6F"/>
                 </a:solidFill>
                 <a:latin typeface="Amiri" pitchFamily="2" charset="-78"/>
+                <a:ea typeface="Amiri" pitchFamily="2" charset="-78"/>
                 <a:cs typeface="Amiri" pitchFamily="2" charset="-78"/>
               </a:rPr>
               <a:t>صَحِيحٌ أَنَّ ثَمَنَهَا أَعْلَى، غَيْرَ أَنَّ مِعْطَفًا بِسِتِّينَ جُنَيْهًا يَدُومُ خَمْسَ سَنَوَاتٍ أَرْخَصُ مِنْ ثَلَاثَةِ مَعَاطِفَ رَخِيصَةٍ تَتَمَزَّقُ كُلَّ سَنَةٍ.</a:t>
@@ -14805,6 +14927,7 @@
                   <a:srgbClr val="1B3B6F"/>
                 </a:solidFill>
                 <a:latin typeface="Amiri" pitchFamily="2" charset="-78"/>
+                <a:ea typeface="Amiri" pitchFamily="2" charset="-78"/>
                 <a:cs typeface="Amiri" pitchFamily="2" charset="-78"/>
               </a:rPr>
               <a:t>لٰكِنَّ المَلَابِسَ الجَيِّدَةَ غَالِيَةٌ جِدًّا!</a:t>
@@ -14908,6 +15031,7 @@
                   <a:srgbClr val="1B3B6F"/>
                 </a:solidFill>
                 <a:latin typeface="Amiri" pitchFamily="2" charset="-78"/>
+                <a:ea typeface="Amiri" pitchFamily="2" charset="-78"/>
                 <a:cs typeface="Amiri" pitchFamily="2" charset="-78"/>
               </a:rPr>
               <a:t>لَوْ أُعْطِيتُ مِئَةَ جُنَيْهٍ، لَادَّخَرْتُ نِصْفَهَا، وَلَاشْتَرَيْتُ بِالبَاقِي حِذَاءً رِيَاضِيًّا جَيِّدًا يَدُومُ طَوِيلًا.</a:t>
@@ -14984,6 +15108,7 @@
                   <a:srgbClr val="1B3B6F"/>
                 </a:solidFill>
                 <a:latin typeface="Amiri" pitchFamily="2" charset="-78"/>
+                <a:ea typeface="Amiri" pitchFamily="2" charset="-78"/>
                 <a:cs typeface="Amiri" pitchFamily="2" charset="-78"/>
               </a:rPr>
               <a:t>لَوْ أُعْطِيتَ مِئَةَ جُنَيْهٍ الآنَ، فِيمَ تُنْفِقُهَا؟</a:t>
@@ -15193,6 +15318,7 @@
                   <a:srgbClr val="D4AF37"/>
                 </a:solidFill>
                 <a:latin typeface="Amiri" pitchFamily="2" charset="-78"/>
+                <a:ea typeface="Amiri" pitchFamily="2" charset="-78"/>
                 <a:cs typeface="Amiri" pitchFamily="2" charset="-78"/>
               </a:rPr>
               <a:t>م</a:t>
@@ -15513,6 +15639,7 @@
                   <a:srgbClr val="8A6D1E"/>
                 </a:solidFill>
                 <a:latin typeface="Amiri" pitchFamily="2" charset="-78"/>
+                <a:ea typeface="Amiri" pitchFamily="2" charset="-78"/>
                 <a:cs typeface="Amiri" pitchFamily="2" charset="-78"/>
               </a:rPr>
               <a:t>أَنَا وَالتَّسَوُّقُ</a:t>
@@ -15793,6 +15920,7 @@
                   <a:srgbClr val="1B3B6F"/>
                 </a:solidFill>
                 <a:latin typeface="Amiri" pitchFamily="2" charset="-78"/>
+                <a:ea typeface="Amiri" pitchFamily="2" charset="-78"/>
                 <a:cs typeface="Amiri" pitchFamily="2" charset="-78"/>
               </a:rPr>
               <a:t>نَعَمْ / لَا، … لِأَنَّ …</a:t>
@@ -15869,6 +15997,7 @@
                   <a:srgbClr val="1B3B6F"/>
                 </a:solidFill>
                 <a:latin typeface="Amiri" pitchFamily="2" charset="-78"/>
+                <a:ea typeface="Amiri" pitchFamily="2" charset="-78"/>
                 <a:cs typeface="Amiri" pitchFamily="2" charset="-78"/>
               </a:rPr>
               <a:t>هَلْ تُحِبُّ التَّسَوُّقَ؟</a:t>
@@ -16037,6 +16166,7 @@
                   <a:srgbClr val="1B3B6F"/>
                 </a:solidFill>
                 <a:latin typeface="Amiri" pitchFamily="2" charset="-78"/>
+                <a:ea typeface="Amiri" pitchFamily="2" charset="-78"/>
                 <a:cs typeface="Amiri" pitchFamily="2" charset="-78"/>
               </a:rPr>
               <a:t>أَشْتَرِي مَلَابِسِي مِنْ …</a:t>
@@ -16113,6 +16243,7 @@
                   <a:srgbClr val="1B3B6F"/>
                 </a:solidFill>
                 <a:latin typeface="Amiri" pitchFamily="2" charset="-78"/>
+                <a:ea typeface="Amiri" pitchFamily="2" charset="-78"/>
                 <a:cs typeface="Amiri" pitchFamily="2" charset="-78"/>
               </a:rPr>
               <a:t>أَيْنَ تَشْتَرِي مَلَابِسَكَ؟</a:t>
@@ -16281,6 +16412,7 @@
                   <a:srgbClr val="1B3B6F"/>
                 </a:solidFill>
                 <a:latin typeface="Amiri" pitchFamily="2" charset="-78"/>
+                <a:ea typeface="Amiri" pitchFamily="2" charset="-78"/>
                 <a:cs typeface="Amiri" pitchFamily="2" charset="-78"/>
               </a:rPr>
               <a:t>اشْتَرَيْتُ …</a:t>
@@ -16357,6 +16489,7 @@
                   <a:srgbClr val="1B3B6F"/>
                 </a:solidFill>
                 <a:latin typeface="Amiri" pitchFamily="2" charset="-78"/>
+                <a:ea typeface="Amiri" pitchFamily="2" charset="-78"/>
                 <a:cs typeface="Amiri" pitchFamily="2" charset="-78"/>
               </a:rPr>
               <a:t>مَاذَا اشْتَرَيْتَ آخِرَ مَرَّةٍ؟</a:t>
@@ -16525,6 +16658,7 @@
                   <a:srgbClr val="1B3B6F"/>
                 </a:solidFill>
                 <a:latin typeface="Amiri" pitchFamily="2" charset="-78"/>
+                <a:ea typeface="Amiri" pitchFamily="2" charset="-78"/>
                 <a:cs typeface="Amiri" pitchFamily="2" charset="-78"/>
               </a:rPr>
               <a:t>كَانَ ثَمَنُهُ …</a:t>
@@ -16601,6 +16735,7 @@
                   <a:srgbClr val="1B3B6F"/>
                 </a:solidFill>
                 <a:latin typeface="Amiri" pitchFamily="2" charset="-78"/>
+                <a:ea typeface="Amiri" pitchFamily="2" charset="-78"/>
                 <a:cs typeface="Amiri" pitchFamily="2" charset="-78"/>
               </a:rPr>
               <a:t>كَمْ كَانَ ثَمَنُهُ؟</a:t>
@@ -16769,6 +16904,7 @@
                   <a:srgbClr val="1B3B6F"/>
                 </a:solidFill>
                 <a:latin typeface="Amiri" pitchFamily="2" charset="-78"/>
+                <a:ea typeface="Amiri" pitchFamily="2" charset="-78"/>
                 <a:cs typeface="Amiri" pitchFamily="2" charset="-78"/>
               </a:rPr>
               <a:t>نَعَمْ، أَشْتَرِي … عَلَى الإِنْتَرْنِتِ</a:t>
@@ -16845,6 +16981,7 @@
                   <a:srgbClr val="1B3B6F"/>
                 </a:solidFill>
                 <a:latin typeface="Amiri" pitchFamily="2" charset="-78"/>
+                <a:ea typeface="Amiri" pitchFamily="2" charset="-78"/>
                 <a:cs typeface="Amiri" pitchFamily="2" charset="-78"/>
               </a:rPr>
               <a:t>هَلْ تَشْتَرِي عَلَى الإِنْتَرْنِتِ؟</a:t>
@@ -16999,6 +17136,7 @@
                   <a:srgbClr val="1B3B6F"/>
                 </a:solidFill>
                 <a:latin typeface="Amiri" pitchFamily="2" charset="-78"/>
+                <a:ea typeface="Amiri" pitchFamily="2" charset="-78"/>
                 <a:cs typeface="Amiri" pitchFamily="2" charset="-78"/>
               </a:rPr>
               <a:t>عَفْوًا، هَلْ يُمْكِنُ أَنْ تُعِيدَ السُّؤَالَ؟</a:t>
@@ -17132,6 +17270,7 @@
                   <a:srgbClr val="D4AF37"/>
                 </a:solidFill>
                 <a:latin typeface="Amiri" pitchFamily="2" charset="-78"/>
+                <a:ea typeface="Amiri" pitchFamily="2" charset="-78"/>
                 <a:cs typeface="Amiri" pitchFamily="2" charset="-78"/>
               </a:rPr>
               <a:t>م</a:t>
@@ -17452,6 +17591,7 @@
                   <a:srgbClr val="8A6D1E"/>
                 </a:solidFill>
                 <a:latin typeface="Amiri" pitchFamily="2" charset="-78"/>
+                <a:ea typeface="Amiri" pitchFamily="2" charset="-78"/>
                 <a:cs typeface="Amiri" pitchFamily="2" charset="-78"/>
               </a:rPr>
               <a:t>عَادَاتُ التَّسَوُّقِ</a:t>
@@ -17732,6 +17872,7 @@
                   <a:srgbClr val="1B3B6F"/>
                 </a:solidFill>
                 <a:latin typeface="Amiri" pitchFamily="2" charset="-78"/>
+                <a:ea typeface="Amiri" pitchFamily="2" charset="-78"/>
                 <a:cs typeface="Amiri" pitchFamily="2" charset="-78"/>
               </a:rPr>
               <a:t>أُفَضِّلُ … لِأَنَّهُ أَ… ، لٰكِنَّ …</a:t>
@@ -17808,6 +17949,7 @@
                   <a:srgbClr val="1B3B6F"/>
                 </a:solidFill>
                 <a:latin typeface="Amiri" pitchFamily="2" charset="-78"/>
+                <a:ea typeface="Amiri" pitchFamily="2" charset="-78"/>
                 <a:cs typeface="Amiri" pitchFamily="2" charset="-78"/>
               </a:rPr>
               <a:t>هَلْ تُفَضِّلُ التَّسَوُّقَ فِي المَحَلَّاتِ أَمْ عَلَى الإِنْتَرْنِتِ؟</a:t>
@@ -17911,6 +18053,7 @@
                   <a:srgbClr val="1B3B6F"/>
                 </a:solidFill>
                 <a:latin typeface="Amiri" pitchFamily="2" charset="-78"/>
+                <a:ea typeface="Amiri" pitchFamily="2" charset="-78"/>
                 <a:cs typeface="Amiri" pitchFamily="2" charset="-78"/>
               </a:rPr>
               <a:t>اشْتَرَيْتُ … لِأُمِّي … وَكَانَ ثَمَنُهُ …</a:t>
@@ -17987,6 +18130,7 @@
                   <a:srgbClr val="1B3B6F"/>
                 </a:solidFill>
                 <a:latin typeface="Amiri" pitchFamily="2" charset="-78"/>
+                <a:ea typeface="Amiri" pitchFamily="2" charset="-78"/>
                 <a:cs typeface="Amiri" pitchFamily="2" charset="-78"/>
               </a:rPr>
               <a:t>صِفْ آخِرَ مَرَّةٍ اشْتَرَيْتَ فِيهَا هَدِيَّةً.</a:t>
@@ -18090,6 +18234,7 @@
                   <a:srgbClr val="1B3B6F"/>
                 </a:solidFill>
                 <a:latin typeface="Amiri" pitchFamily="2" charset="-78"/>
+                <a:ea typeface="Amiri" pitchFamily="2" charset="-78"/>
                 <a:cs typeface="Amiri" pitchFamily="2" charset="-78"/>
               </a:rPr>
               <a:t>نَعَمْ، لِأَنَّ … فَمَثَلًا …</a:t>
@@ -18166,6 +18311,7 @@
                   <a:srgbClr val="1B3B6F"/>
                 </a:solidFill>
                 <a:latin typeface="Amiri" pitchFamily="2" charset="-78"/>
+                <a:ea typeface="Amiri" pitchFamily="2" charset="-78"/>
                 <a:cs typeface="Amiri" pitchFamily="2" charset="-78"/>
               </a:rPr>
               <a:t>هَلْ تَنْتَظِرُ التَّخْفِيضَاتِ؟</a:t>
@@ -18269,6 +18415,7 @@
                   <a:srgbClr val="1B3B6F"/>
                 </a:solidFill>
                 <a:latin typeface="Amiri" pitchFamily="2" charset="-78"/>
+                <a:ea typeface="Amiri" pitchFamily="2" charset="-78"/>
                 <a:cs typeface="Amiri" pitchFamily="2" charset="-78"/>
               </a:rPr>
               <a:t>نَعَمْ، اشْتَرَيْتُ … لٰكِنَّ … فَأَرْجَعْتُهُ …</a:t>
@@ -18345,6 +18492,7 @@
                   <a:srgbClr val="1B3B6F"/>
                 </a:solidFill>
                 <a:latin typeface="Amiri" pitchFamily="2" charset="-78"/>
+                <a:ea typeface="Amiri" pitchFamily="2" charset="-78"/>
                 <a:cs typeface="Amiri" pitchFamily="2" charset="-78"/>
               </a:rPr>
               <a:t>هَلْ حَدَثَتْ لَكَ مُشْكِلَةٌ عِنْدَ الشِّرَاءِ؟</a:t>
@@ -18448,6 +18596,7 @@
                   <a:srgbClr val="1B3B6F"/>
                 </a:solidFill>
                 <a:latin typeface="Amiri" pitchFamily="2" charset="-78"/>
+                <a:ea typeface="Amiri" pitchFamily="2" charset="-78"/>
                 <a:cs typeface="Amiri" pitchFamily="2" charset="-78"/>
               </a:rPr>
               <a:t>أَصْرِفُ … عَلَى … وَأَدَّخِرُ …</a:t>
@@ -18524,6 +18673,7 @@
                   <a:srgbClr val="1B3B6F"/>
                 </a:solidFill>
                 <a:latin typeface="Amiri" pitchFamily="2" charset="-78"/>
+                <a:ea typeface="Amiri" pitchFamily="2" charset="-78"/>
                 <a:cs typeface="Amiri" pitchFamily="2" charset="-78"/>
               </a:rPr>
               <a:t>كَيْفَ تَصْرِفُ مَصْرُوفَكَ؟</a:t>
@@ -18733,6 +18883,7 @@
                   <a:srgbClr val="D4AF37"/>
                 </a:solidFill>
                 <a:latin typeface="Amiri" pitchFamily="2" charset="-78"/>
+                <a:ea typeface="Amiri" pitchFamily="2" charset="-78"/>
                 <a:cs typeface="Amiri" pitchFamily="2" charset="-78"/>
               </a:rPr>
               <a:t>م</a:t>
@@ -19053,6 +19204,7 @@
                   <a:srgbClr val="8A6D1E"/>
                 </a:solidFill>
                 <a:latin typeface="Amiri" pitchFamily="2" charset="-78"/>
+                <a:ea typeface="Amiri" pitchFamily="2" charset="-78"/>
                 <a:cs typeface="Amiri" pitchFamily="2" charset="-78"/>
               </a:rPr>
               <a:t>المُسْتَهْلِكُ الذَّكِيُّ</a:t>
@@ -19333,6 +19485,7 @@
                   <a:srgbClr val="1B3B6F"/>
                 </a:solidFill>
                 <a:latin typeface="Amiri" pitchFamily="2" charset="-78"/>
+                <a:ea typeface="Amiri" pitchFamily="2" charset="-78"/>
                 <a:cs typeface="Amiri" pitchFamily="2" charset="-78"/>
               </a:rPr>
               <a:t>بِلَا شَكٍّ؛ فَالمُؤَثِّرُونَ …</a:t>
@@ -19409,6 +19562,7 @@
                   <a:srgbClr val="1B3B6F"/>
                 </a:solidFill>
                 <a:latin typeface="Amiri" pitchFamily="2" charset="-78"/>
+                <a:ea typeface="Amiri" pitchFamily="2" charset="-78"/>
                 <a:cs typeface="Amiri" pitchFamily="2" charset="-78"/>
               </a:rPr>
               <a:t>هَلْ يُؤَثِّرُ الإِعْلَانُ فِي اخْتِيَارَاتِنَا؟</a:t>
@@ -19512,6 +19666,7 @@
                   <a:srgbClr val="1B3B6F"/>
                 </a:solidFill>
                 <a:latin typeface="Amiri" pitchFamily="2" charset="-78"/>
+                <a:ea typeface="Amiri" pitchFamily="2" charset="-78"/>
                 <a:cs typeface="Amiri" pitchFamily="2" charset="-78"/>
               </a:rPr>
               <a:t>مِنْ نَاحِيَةٍ … وَمِنْ نَاحِيَةٍ أُخْرَى …</a:t>
@@ -19588,6 +19743,7 @@
                   <a:srgbClr val="1B3B6F"/>
                 </a:solidFill>
                 <a:latin typeface="Amiri" pitchFamily="2" charset="-78"/>
+                <a:ea typeface="Amiri" pitchFamily="2" charset="-78"/>
                 <a:cs typeface="Amiri" pitchFamily="2" charset="-78"/>
               </a:rPr>
               <a:t>مَا مَزَايَا التَّسَوُّقِ عَلَى الإِنْتَرْنِتِ وَعُيُوبُهُ؟</a:t>
@@ -19691,6 +19847,7 @@
                   <a:srgbClr val="1B3B6F"/>
                 </a:solidFill>
                 <a:latin typeface="Amiri" pitchFamily="2" charset="-78"/>
+                <a:ea typeface="Amiri" pitchFamily="2" charset="-78"/>
                 <a:cs typeface="Amiri" pitchFamily="2" charset="-78"/>
               </a:rPr>
               <a:t>لَيْسَ بِالضَّرُورَةِ؛ فَأَحْيَانًا …</a:t>
@@ -19767,6 +19924,7 @@
                   <a:srgbClr val="1B3B6F"/>
                 </a:solidFill>
                 <a:latin typeface="Amiri" pitchFamily="2" charset="-78"/>
+                <a:ea typeface="Amiri" pitchFamily="2" charset="-78"/>
                 <a:cs typeface="Amiri" pitchFamily="2" charset="-78"/>
               </a:rPr>
               <a:t>هَلِ الأَغْلَى دَائِمًا أَفْضَلُ؟</a:t>
@@ -19870,6 +20028,7 @@
                   <a:srgbClr val="1B3B6F"/>
                 </a:solidFill>
                 <a:latin typeface="Amiri" pitchFamily="2" charset="-78"/>
+                <a:ea typeface="Amiri" pitchFamily="2" charset="-78"/>
                 <a:cs typeface="Amiri" pitchFamily="2" charset="-78"/>
               </a:rPr>
               <a:t>كَانَ وَالِدَايَ … أَمَّا نَحْنُ فَنَطْلُبُ …</a:t>
@@ -19946,6 +20105,7 @@
                   <a:srgbClr val="1B3B6F"/>
                 </a:solidFill>
                 <a:latin typeface="Amiri" pitchFamily="2" charset="-78"/>
+                <a:ea typeface="Amiri" pitchFamily="2" charset="-78"/>
                 <a:cs typeface="Amiri" pitchFamily="2" charset="-78"/>
               </a:rPr>
               <a:t>كَيْفَ تَغَيَّرَ التَّسَوُّقُ مُنْذُ أَيَّامِ وَالِدَيْكَ؟</a:t>
@@ -20049,6 +20209,7 @@
                   <a:srgbClr val="1B3B6F"/>
                 </a:solidFill>
                 <a:latin typeface="Amiri" pitchFamily="2" charset="-78"/>
+                <a:ea typeface="Amiri" pitchFamily="2" charset="-78"/>
                 <a:cs typeface="Amiri" pitchFamily="2" charset="-78"/>
               </a:rPr>
               <a:t>لَوْ مُنِعَ …، لَعَادَتِ …</a:t>
@@ -20125,6 +20286,7 @@
                   <a:srgbClr val="1B3B6F"/>
                 </a:solidFill>
                 <a:latin typeface="Amiri" pitchFamily="2" charset="-78"/>
+                <a:ea typeface="Amiri" pitchFamily="2" charset="-78"/>
                 <a:cs typeface="Amiri" pitchFamily="2" charset="-78"/>
               </a:rPr>
               <a:t>لَوْ مُنِعَ التَّسَوُّقُ عَلَى الإِنْتَرْنِتِ، كَيْفَ تَتَغَيَّرُ حَيَاتُنَا؟</a:t>
@@ -20334,6 +20496,7 @@
                   <a:srgbClr val="D4AF37"/>
                 </a:solidFill>
                 <a:latin typeface="Amiri" pitchFamily="2" charset="-78"/>
+                <a:ea typeface="Amiri" pitchFamily="2" charset="-78"/>
                 <a:cs typeface="Amiri" pitchFamily="2" charset="-78"/>
               </a:rPr>
               <a:t>م</a:t>
@@ -20654,6 +20817,7 @@
                   <a:srgbClr val="8A6D1E"/>
                 </a:solidFill>
                 <a:latin typeface="Amiri" pitchFamily="2" charset="-78"/>
+                <a:ea typeface="Amiri" pitchFamily="2" charset="-78"/>
                 <a:cs typeface="Amiri" pitchFamily="2" charset="-78"/>
               </a:rPr>
               <a:t>آدَابُ الصَّفِّ</a:t>
@@ -22185,6 +22349,7 @@
                   <a:srgbClr val="D4AF37"/>
                 </a:solidFill>
                 <a:latin typeface="Amiri" pitchFamily="2" charset="-78"/>
+                <a:ea typeface="Amiri" pitchFamily="2" charset="-78"/>
                 <a:cs typeface="Amiri" pitchFamily="2" charset="-78"/>
               </a:rPr>
               <a:t>م</a:t>
@@ -22505,6 +22670,7 @@
                   <a:srgbClr val="8A6D1E"/>
                 </a:solidFill>
                 <a:latin typeface="Amiri" pitchFamily="2" charset="-78"/>
+                <a:ea typeface="Amiri" pitchFamily="2" charset="-78"/>
                 <a:cs typeface="Amiri" pitchFamily="2" charset="-78"/>
               </a:rPr>
               <a:t>نَمُوذَجُ الإِجَابَةِ</a:t>
@@ -22747,6 +22913,7 @@
                   <a:srgbClr val="1B3B6F"/>
                 </a:solidFill>
                 <a:latin typeface="Amiri" pitchFamily="2" charset="-78"/>
+                <a:ea typeface="Amiri" pitchFamily="2" charset="-78"/>
                 <a:cs typeface="Amiri" pitchFamily="2" charset="-78"/>
               </a:rPr>
               <a:t>نَعَمْ، أُحِبُّ التَّسَوُّقَ مَعَ أَصْدِقَائِي.</a:t>
@@ -22823,6 +22990,7 @@
                   <a:srgbClr val="1B3B6F"/>
                 </a:solidFill>
                 <a:latin typeface="Amiri" pitchFamily="2" charset="-78"/>
+                <a:ea typeface="Amiri" pitchFamily="2" charset="-78"/>
                 <a:cs typeface="Amiri" pitchFamily="2" charset="-78"/>
               </a:rPr>
               <a:t>هَلْ تُحِبُّ التَّسَوُّقَ؟</a:t>
@@ -22926,6 +23094,7 @@
                   <a:srgbClr val="1B3B6F"/>
                 </a:solidFill>
                 <a:latin typeface="Amiri" pitchFamily="2" charset="-78"/>
+                <a:ea typeface="Amiri" pitchFamily="2" charset="-78"/>
                 <a:cs typeface="Amiri" pitchFamily="2" charset="-78"/>
               </a:rPr>
               <a:t>أَشْتَرِي مَلَابِسِي مِنَ المَرْكَزِ التِّجَارِيِّ.</a:t>
@@ -23002,6 +23171,7 @@
                   <a:srgbClr val="1B3B6F"/>
                 </a:solidFill>
                 <a:latin typeface="Amiri" pitchFamily="2" charset="-78"/>
+                <a:ea typeface="Amiri" pitchFamily="2" charset="-78"/>
                 <a:cs typeface="Amiri" pitchFamily="2" charset="-78"/>
               </a:rPr>
               <a:t>أَيْنَ تَشْتَرِي مَلَابِسَكَ؟</a:t>
@@ -23105,6 +23275,7 @@
                   <a:srgbClr val="1B3B6F"/>
                 </a:solidFill>
                 <a:latin typeface="Amiri" pitchFamily="2" charset="-78"/>
+                <a:ea typeface="Amiri" pitchFamily="2" charset="-78"/>
                 <a:cs typeface="Amiri" pitchFamily="2" charset="-78"/>
               </a:rPr>
               <a:t>اشْتَرَيْتُ حِذَاءً رِيَاضِيًّا أَبْيَضَ.</a:t>
@@ -23181,6 +23352,7 @@
                   <a:srgbClr val="1B3B6F"/>
                 </a:solidFill>
                 <a:latin typeface="Amiri" pitchFamily="2" charset="-78"/>
+                <a:ea typeface="Amiri" pitchFamily="2" charset="-78"/>
                 <a:cs typeface="Amiri" pitchFamily="2" charset="-78"/>
               </a:rPr>
               <a:t>مَاذَا اشْتَرَيْتَ آخِرَ مَرَّةٍ؟</a:t>
@@ -23284,6 +23456,7 @@
                   <a:srgbClr val="1B3B6F"/>
                 </a:solidFill>
                 <a:latin typeface="Amiri" pitchFamily="2" charset="-78"/>
+                <a:ea typeface="Amiri" pitchFamily="2" charset="-78"/>
                 <a:cs typeface="Amiri" pitchFamily="2" charset="-78"/>
               </a:rPr>
               <a:t>كَانَ ثَمَنُهُ خَمْسِينَ جُنَيْهًا.</a:t>
@@ -23360,6 +23533,7 @@
                   <a:srgbClr val="1B3B6F"/>
                 </a:solidFill>
                 <a:latin typeface="Amiri" pitchFamily="2" charset="-78"/>
+                <a:ea typeface="Amiri" pitchFamily="2" charset="-78"/>
                 <a:cs typeface="Amiri" pitchFamily="2" charset="-78"/>
               </a:rPr>
               <a:t>كَمْ كَانَ ثَمَنُهُ؟</a:t>
@@ -23463,6 +23637,7 @@
                   <a:srgbClr val="1B3B6F"/>
                 </a:solidFill>
                 <a:latin typeface="Amiri" pitchFamily="2" charset="-78"/>
+                <a:ea typeface="Amiri" pitchFamily="2" charset="-78"/>
                 <a:cs typeface="Amiri" pitchFamily="2" charset="-78"/>
               </a:rPr>
               <a:t>نَعَمْ، أَشْتَرِي الكُتُبَ عَلَى الإِنْتَرْنِتِ، لِأَنَّهَا أَرْخَصُ.</a:t>
@@ -23539,6 +23714,7 @@
                   <a:srgbClr val="1B3B6F"/>
                 </a:solidFill>
                 <a:latin typeface="Amiri" pitchFamily="2" charset="-78"/>
+                <a:ea typeface="Amiri" pitchFamily="2" charset="-78"/>
                 <a:cs typeface="Amiri" pitchFamily="2" charset="-78"/>
               </a:rPr>
               <a:t>هَلْ تَشْتَرِي عَلَى الإِنْتَرْنِتِ؟</a:t>
@@ -23748,6 +23924,7 @@
                   <a:srgbClr val="D4AF37"/>
                 </a:solidFill>
                 <a:latin typeface="Amiri" pitchFamily="2" charset="-78"/>
+                <a:ea typeface="Amiri" pitchFamily="2" charset="-78"/>
                 <a:cs typeface="Amiri" pitchFamily="2" charset="-78"/>
               </a:rPr>
               <a:t>م</a:t>
@@ -24068,6 +24245,7 @@
                   <a:srgbClr val="8A6D1E"/>
                 </a:solidFill>
                 <a:latin typeface="Amiri" pitchFamily="2" charset="-78"/>
+                <a:ea typeface="Amiri" pitchFamily="2" charset="-78"/>
                 <a:cs typeface="Amiri" pitchFamily="2" charset="-78"/>
               </a:rPr>
               <a:t>نَمُوذَجُ الإِجَابَةِ</a:t>
@@ -24310,6 +24488,7 @@
                   <a:srgbClr val="1B3B6F"/>
                 </a:solidFill>
                 <a:latin typeface="Amiri" pitchFamily="2" charset="-78"/>
+                <a:ea typeface="Amiri" pitchFamily="2" charset="-78"/>
                 <a:cs typeface="Amiri" pitchFamily="2" charset="-78"/>
               </a:rPr>
               <a:t>أُفَضِّلُ الإِنْتَرْنِتَ، لِأَنَّهُ أَسْهَلُ وَأَرْخَصُ، لٰكِنَّنِي أَشْتَرِي المَلَابِسَ مِنَ المَحَلِّ لِأُجَرِّبَهَا.</a:t>
@@ -24389,6 +24568,7 @@
                   <a:srgbClr val="1B3B6F"/>
                 </a:solidFill>
                 <a:latin typeface="Amiri" pitchFamily="2" charset="-78"/>
+                <a:ea typeface="Amiri" pitchFamily="2" charset="-78"/>
                 <a:cs typeface="Amiri" pitchFamily="2" charset="-78"/>
               </a:rPr>
               <a:t>هَلْ تُفَضِّلُ التَّسَوُّقَ فِي المَحَلَّاتِ أَمْ عَلَى الإِنْتَرْنِتِ؟</a:t>
@@ -24492,6 +24672,7 @@
                   <a:srgbClr val="1B3B6F"/>
                 </a:solidFill>
                 <a:latin typeface="Amiri" pitchFamily="2" charset="-78"/>
+                <a:ea typeface="Amiri" pitchFamily="2" charset="-78"/>
                 <a:cs typeface="Amiri" pitchFamily="2" charset="-78"/>
               </a:rPr>
               <a:t>اشْتَرَيْتُ عِطْرًا لِأُمِّي فِي عِيدِ الأُمِّ، وَكَانَ ثَمَنُهُ خَمْسَةً وَثَلَاثِينَ جُنَيْهًا، وَفَرِحَتْ بِهِ كَثِيرًا.</a:t>
@@ -24568,6 +24749,7 @@
                   <a:srgbClr val="1B3B6F"/>
                 </a:solidFill>
                 <a:latin typeface="Amiri" pitchFamily="2" charset="-78"/>
+                <a:ea typeface="Amiri" pitchFamily="2" charset="-78"/>
                 <a:cs typeface="Amiri" pitchFamily="2" charset="-78"/>
               </a:rPr>
               <a:t>صِفْ آخِرَ مَرَّةٍ اشْتَرَيْتَ فِيهَا هَدِيَّةً.</a:t>
@@ -24671,6 +24853,7 @@
                   <a:srgbClr val="1B3B6F"/>
                 </a:solidFill>
                 <a:latin typeface="Amiri" pitchFamily="2" charset="-78"/>
+                <a:ea typeface="Amiri" pitchFamily="2" charset="-78"/>
                 <a:cs typeface="Amiri" pitchFamily="2" charset="-78"/>
               </a:rPr>
               <a:t>نَعَمْ، لِأَنَّ الأَسْعَارَ تَنْخَفِضُ كَثِيرًا؛ فَمَثَلًا اشْتَرَيْتُ مِعْطَفِي بِنِصْفِ الثَّمَنِ.</a:t>
@@ -24747,6 +24930,7 @@
                   <a:srgbClr val="1B3B6F"/>
                 </a:solidFill>
                 <a:latin typeface="Amiri" pitchFamily="2" charset="-78"/>
+                <a:ea typeface="Amiri" pitchFamily="2" charset="-78"/>
                 <a:cs typeface="Amiri" pitchFamily="2" charset="-78"/>
               </a:rPr>
               <a:t>هَلْ تَنْتَظِرُ التَّخْفِيضَاتِ؟</a:t>
@@ -24850,6 +25034,7 @@
                   <a:srgbClr val="1B3B6F"/>
                 </a:solidFill>
                 <a:latin typeface="Amiri" pitchFamily="2" charset="-78"/>
+                <a:ea typeface="Amiri" pitchFamily="2" charset="-78"/>
                 <a:cs typeface="Amiri" pitchFamily="2" charset="-78"/>
               </a:rPr>
               <a:t>نَعَمْ، اشْتَرَيْتُ قَمِيصًا عَلَى الإِنْتَرْنِتِ، لٰكِنَّ مَقَاسَهُ كَانَ صَغِيرًا، فَأَرْجَعْتُهُ بِالبَرِيدِ.</a:t>
@@ -24926,6 +25111,7 @@
                   <a:srgbClr val="1B3B6F"/>
                 </a:solidFill>
                 <a:latin typeface="Amiri" pitchFamily="2" charset="-78"/>
+                <a:ea typeface="Amiri" pitchFamily="2" charset="-78"/>
                 <a:cs typeface="Amiri" pitchFamily="2" charset="-78"/>
               </a:rPr>
               <a:t>هَلْ حَدَثَتْ لَكَ مُشْكِلَةٌ عِنْدَ الشِّرَاءِ؟</a:t>
@@ -25029,6 +25215,7 @@
                   <a:srgbClr val="1B3B6F"/>
                 </a:solidFill>
                 <a:latin typeface="Amiri" pitchFamily="2" charset="-78"/>
+                <a:ea typeface="Amiri" pitchFamily="2" charset="-78"/>
                 <a:cs typeface="Amiri" pitchFamily="2" charset="-78"/>
               </a:rPr>
               <a:t>أَصْرِفُ جُزْءًا عَلَى الطَّعَامِ وَالمُوَاصَلَاتِ، وَأَدَّخِرُ البَاقِيَ لِشِرَاءِ حَاسُوبٍ جَدِيدٍ.</a:t>
@@ -25105,6 +25292,7 @@
                   <a:srgbClr val="1B3B6F"/>
                 </a:solidFill>
                 <a:latin typeface="Amiri" pitchFamily="2" charset="-78"/>
+                <a:ea typeface="Amiri" pitchFamily="2" charset="-78"/>
                 <a:cs typeface="Amiri" pitchFamily="2" charset="-78"/>
               </a:rPr>
               <a:t>كَيْفَ تَصْرِفُ مَصْرُوفَكَ؟</a:t>
@@ -25314,6 +25502,7 @@
                   <a:srgbClr val="D4AF37"/>
                 </a:solidFill>
                 <a:latin typeface="Amiri" pitchFamily="2" charset="-78"/>
+                <a:ea typeface="Amiri" pitchFamily="2" charset="-78"/>
                 <a:cs typeface="Amiri" pitchFamily="2" charset="-78"/>
               </a:rPr>
               <a:t>م</a:t>
@@ -25634,6 +25823,7 @@
                   <a:srgbClr val="8A6D1E"/>
                 </a:solidFill>
                 <a:latin typeface="Amiri" pitchFamily="2" charset="-78"/>
+                <a:ea typeface="Amiri" pitchFamily="2" charset="-78"/>
                 <a:cs typeface="Amiri" pitchFamily="2" charset="-78"/>
               </a:rPr>
               <a:t>نَمُوذَجُ الإِجَابَةِ</a:t>
@@ -25876,6 +26066,7 @@
                   <a:srgbClr val="1B3B6F"/>
                 </a:solidFill>
                 <a:latin typeface="Amiri" pitchFamily="2" charset="-78"/>
+                <a:ea typeface="Amiri" pitchFamily="2" charset="-78"/>
                 <a:cs typeface="Amiri" pitchFamily="2" charset="-78"/>
               </a:rPr>
               <a:t>بِلَا شَكٍّ؛ فَالمُؤَثِّرُونَ عَلَى الإِنْتَرْنِتِ يُقْنِعُونَنَا بِأَنَّنَا نَحْتَاجُ إِلَى أَشْيَاءَ لَمْ نَكُنْ نُفَكِّرُ فِيهَا أَصْلًا.</a:t>
@@ -25952,6 +26143,7 @@
                   <a:srgbClr val="1B3B6F"/>
                 </a:solidFill>
                 <a:latin typeface="Amiri" pitchFamily="2" charset="-78"/>
+                <a:ea typeface="Amiri" pitchFamily="2" charset="-78"/>
                 <a:cs typeface="Amiri" pitchFamily="2" charset="-78"/>
               </a:rPr>
               <a:t>هَلْ يُؤَثِّرُ الإِعْلَانُ فِي اخْتِيَارَاتِنَا؟</a:t>
@@ -26055,6 +26247,7 @@
                   <a:srgbClr val="1B3B6F"/>
                 </a:solidFill>
                 <a:latin typeface="Amiri" pitchFamily="2" charset="-78"/>
+                <a:ea typeface="Amiri" pitchFamily="2" charset="-78"/>
                 <a:cs typeface="Amiri" pitchFamily="2" charset="-78"/>
               </a:rPr>
               <a:t>مِنْ نَاحِيَةٍ، يُوَفِّرُ الوَقْتَ وَيُتِيحُ مُقَارَنَةَ الأَسْعَارِ، وَمِنْ نَاحِيَةٍ أُخْرَى، يُضِرُّ بِالمَحَلَّاتِ الصَّغِيرَةِ، وَيَزِيدُ التَّغْلِيفَ وَالتَّوْصِيلَ.</a:t>
@@ -26131,6 +26324,7 @@
                   <a:srgbClr val="1B3B6F"/>
                 </a:solidFill>
                 <a:latin typeface="Amiri" pitchFamily="2" charset="-78"/>
+                <a:ea typeface="Amiri" pitchFamily="2" charset="-78"/>
                 <a:cs typeface="Amiri" pitchFamily="2" charset="-78"/>
               </a:rPr>
               <a:t>مَا مَزَايَا التَّسَوُّقِ عَلَى الإِنْتَرْنِتِ وَعُيُوبُهُ؟</a:t>
@@ -26234,6 +26428,7 @@
                   <a:srgbClr val="1B3B6F"/>
                 </a:solidFill>
                 <a:latin typeface="Amiri" pitchFamily="2" charset="-78"/>
+                <a:ea typeface="Amiri" pitchFamily="2" charset="-78"/>
                 <a:cs typeface="Amiri" pitchFamily="2" charset="-78"/>
               </a:rPr>
               <a:t>لَيْسَ بِالضَّرُورَةِ؛ فَأَحْيَانًا نَدْفَعُ ثَمَنَ اسْمِ المَارْكَةِ فَقَطْ، وَالجَوْدَةُ مُتَشَابِهَةٌ.</a:t>
@@ -26310,6 +26505,7 @@
                   <a:srgbClr val="1B3B6F"/>
                 </a:solidFill>
                 <a:latin typeface="Amiri" pitchFamily="2" charset="-78"/>
+                <a:ea typeface="Amiri" pitchFamily="2" charset="-78"/>
                 <a:cs typeface="Amiri" pitchFamily="2" charset="-78"/>
               </a:rPr>
               <a:t>هَلِ الأَغْلَى دَائِمًا أَفْضَلُ؟</a:t>
@@ -26519,6 +26715,7 @@
                   <a:srgbClr val="D4AF37"/>
                 </a:solidFill>
                 <a:latin typeface="Amiri" pitchFamily="2" charset="-78"/>
+                <a:ea typeface="Amiri" pitchFamily="2" charset="-78"/>
                 <a:cs typeface="Amiri" pitchFamily="2" charset="-78"/>
               </a:rPr>
               <a:t>م</a:t>
@@ -26839,6 +27036,7 @@
                   <a:srgbClr val="8A6D1E"/>
                 </a:solidFill>
                 <a:latin typeface="Amiri" pitchFamily="2" charset="-78"/>
+                <a:ea typeface="Amiri" pitchFamily="2" charset="-78"/>
                 <a:cs typeface="Amiri" pitchFamily="2" charset="-78"/>
               </a:rPr>
               <a:t>نَمُوذَجُ الإِجَابَةِ</a:t>
@@ -27081,6 +27279,7 @@
                   <a:srgbClr val="1B3B6F"/>
                 </a:solidFill>
                 <a:latin typeface="Amiri" pitchFamily="2" charset="-78"/>
+                <a:ea typeface="Amiri" pitchFamily="2" charset="-78"/>
                 <a:cs typeface="Amiri" pitchFamily="2" charset="-78"/>
               </a:rPr>
               <a:t>كَانَ وَالِدَايَ يَشْتَرِيَانِ كُلَّ شَيْءٍ مِنَ السُّوقِ المَحَلِّيِّ وَيَعْرِفَانِ البَائِعِينَ، أَمَّا نَحْنُ فَنَطْلُبُ مِنْ شَرِكَاتٍ لَا نَعْرِفُ أَيْنَ تَقَعُ.</a:t>
@@ -27157,6 +27356,7 @@
                   <a:srgbClr val="1B3B6F"/>
                 </a:solidFill>
                 <a:latin typeface="Amiri" pitchFamily="2" charset="-78"/>
+                <a:ea typeface="Amiri" pitchFamily="2" charset="-78"/>
                 <a:cs typeface="Amiri" pitchFamily="2" charset="-78"/>
               </a:rPr>
               <a:t>كَيْفَ تَغَيَّرَ التَّسَوُّقُ مُنْذُ أَيَّامِ وَالِدَيْكَ؟</a:t>
@@ -27260,6 +27460,7 @@
                   <a:srgbClr val="1B3B6F"/>
                 </a:solidFill>
                 <a:latin typeface="Amiri" pitchFamily="2" charset="-78"/>
+                <a:ea typeface="Amiri" pitchFamily="2" charset="-78"/>
                 <a:cs typeface="Amiri" pitchFamily="2" charset="-78"/>
               </a:rPr>
               <a:t>لَوْ مُنِعَ، لَعَادَتِ الحَيَاةُ إِلَى الأَسْوَاقِ المَحَلِّيَّةِ، وَلَاشْتَرَيْنَا أَقَلَّ، لٰكِنَّ كِبَارَ السِّنِّ وَالمَرْضَى سَيُعَانُونَ.</a:t>
@@ -27339,6 +27540,7 @@
                   <a:srgbClr val="1B3B6F"/>
                 </a:solidFill>
                 <a:latin typeface="Amiri" pitchFamily="2" charset="-78"/>
+                <a:ea typeface="Amiri" pitchFamily="2" charset="-78"/>
                 <a:cs typeface="Amiri" pitchFamily="2" charset="-78"/>
               </a:rPr>
               <a:t>لَوْ مُنِعَ التَّسَوُّقُ عَلَى الإِنْتَرْنِتِ، كَيْفَ تَتَغَيَّرُ حَيَاتُنَا؟</a:t>
@@ -27548,6 +27750,7 @@
                   <a:srgbClr val="D4AF37"/>
                 </a:solidFill>
                 <a:latin typeface="Amiri" pitchFamily="2" charset="-78"/>
+                <a:ea typeface="Amiri" pitchFamily="2" charset="-78"/>
                 <a:cs typeface="Amiri" pitchFamily="2" charset="-78"/>
               </a:rPr>
               <a:t>م</a:t>
@@ -27868,6 +28071,7 @@
                   <a:srgbClr val="8A6D1E"/>
                 </a:solidFill>
                 <a:latin typeface="Amiri" pitchFamily="2" charset="-78"/>
+                <a:ea typeface="Amiri" pitchFamily="2" charset="-78"/>
                 <a:cs typeface="Amiri" pitchFamily="2" charset="-78"/>
               </a:rPr>
               <a:t>قَيِّمْ عَمَلَكَ</a:t>
@@ -29112,6 +29316,7 @@
                   <a:srgbClr val="FFFFFF"/>
                 </a:solidFill>
                 <a:latin typeface="Amiri" pitchFamily="2" charset="-78"/>
+                <a:ea typeface="Amiri" pitchFamily="2" charset="-78"/>
                 <a:cs typeface="Amiri" pitchFamily="2" charset="-78"/>
               </a:rPr>
               <a:t>أَحْسَنْتُمْ! إِلَى اللِّقَاءِ</a:t>
@@ -29264,6 +29469,7 @@
                   <a:srgbClr val="D4AF37"/>
                 </a:solidFill>
                 <a:latin typeface="Amiri" pitchFamily="2" charset="-78"/>
+                <a:ea typeface="Amiri" pitchFamily="2" charset="-78"/>
                 <a:cs typeface="Amiri" pitchFamily="2" charset="-78"/>
               </a:rPr>
               <a:t>وَرْشَةُ الكِتَابَةِ</a:t>
@@ -29397,6 +29603,7 @@
                   <a:srgbClr val="D4AF37"/>
                 </a:solidFill>
                 <a:latin typeface="Amiri" pitchFamily="2" charset="-78"/>
+                <a:ea typeface="Amiri" pitchFamily="2" charset="-78"/>
                 <a:cs typeface="Amiri" pitchFamily="2" charset="-78"/>
               </a:rPr>
               <a:t>م</a:t>
@@ -29717,6 +29924,7 @@
                   <a:srgbClr val="8A6D1E"/>
                 </a:solidFill>
                 <a:latin typeface="Amiri" pitchFamily="2" charset="-78"/>
+                <a:ea typeface="Amiri" pitchFamily="2" charset="-78"/>
                 <a:cs typeface="Amiri" pitchFamily="2" charset="-78"/>
               </a:rPr>
               <a:t>خَرِيطَةُ الوَرْشَةِ</a:t>
@@ -30031,6 +30239,7 @@
                   <a:srgbClr val="1B3B6F"/>
                 </a:solidFill>
                 <a:latin typeface="Amiri" pitchFamily="2" charset="-78"/>
+                <a:ea typeface="Amiri" pitchFamily="2" charset="-78"/>
                 <a:cs typeface="Amiri" pitchFamily="2" charset="-78"/>
               </a:rPr>
               <a:t>كَيْفَ</a:t>
@@ -30307,6 +30516,7 @@
                   <a:srgbClr val="1E6B52"/>
                 </a:solidFill>
                 <a:latin typeface="Amiri" pitchFamily="2" charset="-78"/>
+                <a:ea typeface="Amiri" pitchFamily="2" charset="-78"/>
                 <a:cs typeface="Amiri" pitchFamily="2" charset="-78"/>
               </a:rPr>
               <a:t>تَمْثِيلُ الدَّوْرِ</a:t>
@@ -30583,6 +30793,7 @@
                   <a:srgbClr val="8A6D1E"/>
                 </a:solidFill>
                 <a:latin typeface="Amiri" pitchFamily="2" charset="-78"/>
+                <a:ea typeface="Amiri" pitchFamily="2" charset="-78"/>
                 <a:cs typeface="Amiri" pitchFamily="2" charset="-78"/>
               </a:rPr>
               <a:t>النَّمُوذَجُ</a:t>
@@ -30859,6 +31070,7 @@
                   <a:srgbClr val="1E6B52"/>
                 </a:solidFill>
                 <a:latin typeface="Amiri" pitchFamily="2" charset="-78"/>
+                <a:ea typeface="Amiri" pitchFamily="2" charset="-78"/>
                 <a:cs typeface="Amiri" pitchFamily="2" charset="-78"/>
               </a:rPr>
               <a:t>المُحَادَثَةُ</a:t>
@@ -31135,6 +31347,7 @@
                   <a:srgbClr val="8A6D1E"/>
                 </a:solidFill>
                 <a:latin typeface="Amiri" pitchFamily="2" charset="-78"/>
+                <a:ea typeface="Amiri" pitchFamily="2" charset="-78"/>
                 <a:cs typeface="Amiri" pitchFamily="2" charset="-78"/>
               </a:rPr>
               <a:t>قَيِّمْ</a:t>
@@ -31378,6 +31591,7 @@
                   <a:srgbClr val="D4AF37"/>
                 </a:solidFill>
                 <a:latin typeface="Amiri" pitchFamily="2" charset="-78"/>
+                <a:ea typeface="Amiri" pitchFamily="2" charset="-78"/>
                 <a:cs typeface="Amiri" pitchFamily="2" charset="-78"/>
               </a:rPr>
               <a:t>م</a:t>
@@ -31698,6 +31912,7 @@
                   <a:srgbClr val="8A6D1E"/>
                 </a:solidFill>
                 <a:latin typeface="Amiri" pitchFamily="2" charset="-78"/>
+                <a:ea typeface="Amiri" pitchFamily="2" charset="-78"/>
                 <a:cs typeface="Amiri" pitchFamily="2" charset="-78"/>
               </a:rPr>
               <a:t>امْتِحَانُ التَّحَدُّثِ</a:t>
@@ -32322,6 +32537,7 @@
                   <a:srgbClr val="1B3B6F"/>
                 </a:solidFill>
                 <a:latin typeface="Amiri" pitchFamily="2" charset="-78"/>
+                <a:ea typeface="Amiri" pitchFamily="2" charset="-78"/>
                 <a:cs typeface="Amiri" pitchFamily="2" charset="-78"/>
               </a:rPr>
               <a:t>عَفْوًا، هَلْ يُمْكِنُ أَنْ تُعِيدَ السُّؤَالَ؟</a:t>
@@ -32421,6 +32637,7 @@
                   <a:srgbClr val="1B3B6F"/>
                 </a:solidFill>
                 <a:latin typeface="Amiri" pitchFamily="2" charset="-78"/>
+                <a:ea typeface="Amiri" pitchFamily="2" charset="-78"/>
                 <a:cs typeface="Amiri" pitchFamily="2" charset="-78"/>
               </a:rPr>
               <a:t>لَحْظَةً، دَعْنِي أُفَكِّرُ …</a:t>
@@ -32520,6 +32737,7 @@
                   <a:srgbClr val="1B3B6F"/>
                 </a:solidFill>
                 <a:latin typeface="Amiri" pitchFamily="2" charset="-78"/>
+                <a:ea typeface="Amiri" pitchFamily="2" charset="-78"/>
                 <a:cs typeface="Amiri" pitchFamily="2" charset="-78"/>
               </a:rPr>
               <a:t>أَقْصِدُ …</a:t>
@@ -32691,6 +32909,7 @@
                   <a:srgbClr val="D4AF37"/>
                 </a:solidFill>
                 <a:latin typeface="Amiri" pitchFamily="2" charset="-78"/>
+                <a:ea typeface="Amiri" pitchFamily="2" charset="-78"/>
                 <a:cs typeface="Amiri" pitchFamily="2" charset="-78"/>
               </a:rPr>
               <a:t>م</a:t>
@@ -33011,6 +33230,7 @@
                   <a:srgbClr val="8A6D1E"/>
                 </a:solidFill>
                 <a:latin typeface="Amiri" pitchFamily="2" charset="-78"/>
+                <a:ea typeface="Amiri" pitchFamily="2" charset="-78"/>
                 <a:cs typeface="Amiri" pitchFamily="2" charset="-78"/>
               </a:rPr>
               <a:t>كَمْ ثَمَنُهُ؟</a:t>
@@ -33314,6 +33534,7 @@
                   <a:srgbClr val="1B3B6F"/>
                 </a:solidFill>
                 <a:latin typeface="Amiri" pitchFamily="2" charset="-78"/>
+                <a:ea typeface="Amiri" pitchFamily="2" charset="-78"/>
                 <a:cs typeface="Amiri" pitchFamily="2" charset="-78"/>
               </a:rPr>
               <a:t>هٰذَا · هٰذِهِ</a:t>
@@ -33471,6 +33692,7 @@
                   <a:srgbClr val="1B3B6F"/>
                 </a:solidFill>
                 <a:latin typeface="Amiri" pitchFamily="2" charset="-78"/>
+                <a:ea typeface="Amiri" pitchFamily="2" charset="-78"/>
                 <a:cs typeface="Amiri" pitchFamily="2" charset="-78"/>
               </a:rPr>
               <a:t>ذٰلِكَ · تِلْكَ</a:t>
@@ -33574,6 +33796,7 @@
                   <a:srgbClr val="1B3B6F"/>
                 </a:solidFill>
                 <a:latin typeface="Amiri" pitchFamily="2" charset="-78"/>
+                <a:ea typeface="Amiri" pitchFamily="2" charset="-78"/>
                 <a:cs typeface="Amiri" pitchFamily="2" charset="-78"/>
               </a:rPr>
               <a:t>هٰذِهِ</a:t>
@@ -33839,6 +34062,7 @@
                   <a:srgbClr val="1B3B6F"/>
                 </a:solidFill>
                 <a:latin typeface="Amiri" pitchFamily="2" charset="-78"/>
+                <a:ea typeface="Amiri" pitchFamily="2" charset="-78"/>
                 <a:cs typeface="Amiri" pitchFamily="2" charset="-78"/>
               </a:rPr>
               <a:t>ثَمَنٌ · سِعْرٌ</a:t>
@@ -33996,6 +34220,7 @@
                   <a:srgbClr val="1B3B6F"/>
                 </a:solidFill>
                 <a:latin typeface="Amiri" pitchFamily="2" charset="-78"/>
+                <a:ea typeface="Amiri" pitchFamily="2" charset="-78"/>
                 <a:cs typeface="Amiri" pitchFamily="2" charset="-78"/>
               </a:rPr>
               <a:t>أَسْعَارٌ</a:t>
@@ -34099,6 +34324,7 @@
                   <a:srgbClr val="1B3B6F"/>
                 </a:solidFill>
                 <a:latin typeface="Amiri" pitchFamily="2" charset="-78"/>
+                <a:ea typeface="Amiri" pitchFamily="2" charset="-78"/>
                 <a:cs typeface="Amiri" pitchFamily="2" charset="-78"/>
               </a:rPr>
               <a:t>ثَمَنُهَا</a:t>
@@ -34202,6 +34428,7 @@
                   <a:srgbClr val="1B3B6F"/>
                 </a:solidFill>
                 <a:latin typeface="Amiri" pitchFamily="2" charset="-78"/>
+                <a:ea typeface="Amiri" pitchFamily="2" charset="-78"/>
                 <a:cs typeface="Amiri" pitchFamily="2" charset="-78"/>
               </a:rPr>
               <a:t>ثَمَنُهُ</a:t>
@@ -34467,6 +34694,7 @@
                   <a:srgbClr val="1B3B6F"/>
                 </a:solidFill>
                 <a:latin typeface="Amiri" pitchFamily="2" charset="-78"/>
+                <a:ea typeface="Amiri" pitchFamily="2" charset="-78"/>
                 <a:cs typeface="Amiri" pitchFamily="2" charset="-78"/>
               </a:rPr>
               <a:t>رَخِيصٌ · غَالٍ</a:t>
@@ -34624,6 +34852,7 @@
                   <a:srgbClr val="1B3B6F"/>
                 </a:solidFill>
                 <a:latin typeface="Amiri" pitchFamily="2" charset="-78"/>
+                <a:ea typeface="Amiri" pitchFamily="2" charset="-78"/>
                 <a:cs typeface="Amiri" pitchFamily="2" charset="-78"/>
               </a:rPr>
               <a:t>أَرْخَصُ · أَغْلَى</a:t>
@@ -34727,6 +34956,7 @@
                   <a:srgbClr val="1B3B6F"/>
                 </a:solidFill>
                 <a:latin typeface="Amiri" pitchFamily="2" charset="-78"/>
+                <a:ea typeface="Amiri" pitchFamily="2" charset="-78"/>
                 <a:cs typeface="Amiri" pitchFamily="2" charset="-78"/>
               </a:rPr>
               <a:t>رَخِيصَةٌ · غَالِيَةٌ</a:t>
@@ -34992,6 +35222,7 @@
                   <a:srgbClr val="1B3B6F"/>
                 </a:solidFill>
                 <a:latin typeface="Amiri" pitchFamily="2" charset="-78"/>
+                <a:ea typeface="Amiri" pitchFamily="2" charset="-78"/>
                 <a:cs typeface="Amiri" pitchFamily="2" charset="-78"/>
               </a:rPr>
               <a:t>جُنَيْهٌ · دِرْهَمٌ</a:t>
@@ -35149,6 +35380,7 @@
                   <a:srgbClr val="1B3B6F"/>
                 </a:solidFill>
                 <a:latin typeface="Amiri" pitchFamily="2" charset="-78"/>
+                <a:ea typeface="Amiri" pitchFamily="2" charset="-78"/>
                 <a:cs typeface="Amiri" pitchFamily="2" charset="-78"/>
               </a:rPr>
               <a:t>عِشْرُونَ جُنَيْهًا</a:t>
@@ -35252,6 +35484,7 @@
                   <a:srgbClr val="1B3B6F"/>
                 </a:solidFill>
                 <a:latin typeface="Amiri" pitchFamily="2" charset="-78"/>
+                <a:ea typeface="Amiri" pitchFamily="2" charset="-78"/>
                 <a:cs typeface="Amiri" pitchFamily="2" charset="-78"/>
               </a:rPr>
               <a:t>جُنَيْهَاتٌ · دَرَاهِمُ</a:t>
@@ -35517,6 +35750,7 @@
                   <a:srgbClr val="1B3B6F"/>
                 </a:solidFill>
                 <a:latin typeface="Amiri" pitchFamily="2" charset="-78"/>
+                <a:ea typeface="Amiri" pitchFamily="2" charset="-78"/>
                 <a:cs typeface="Amiri" pitchFamily="2" charset="-78"/>
               </a:rPr>
               <a:t>تَخْفِيضَاتٌ</a:t>
@@ -35674,6 +35908,7 @@
                   <a:srgbClr val="1B3B6F"/>
                 </a:solidFill>
                 <a:latin typeface="Amiri" pitchFamily="2" charset="-78"/>
+                <a:ea typeface="Amiri" pitchFamily="2" charset="-78"/>
                 <a:cs typeface="Amiri" pitchFamily="2" charset="-78"/>
               </a:rPr>
               <a:t>نِصْفُ الثَّمَنِ</a:t>
@@ -35777,6 +36012,7 @@
                   <a:srgbClr val="1B3B6F"/>
                 </a:solidFill>
                 <a:latin typeface="Amiri" pitchFamily="2" charset="-78"/>
+                <a:ea typeface="Amiri" pitchFamily="2" charset="-78"/>
                 <a:cs typeface="Amiri" pitchFamily="2" charset="-78"/>
               </a:rPr>
               <a:t>خَصْمٌ</a:t>
@@ -36042,6 +36278,7 @@
                   <a:srgbClr val="1B3B6F"/>
                 </a:solidFill>
                 <a:latin typeface="Amiri" pitchFamily="2" charset="-78"/>
+                <a:ea typeface="Amiri" pitchFamily="2" charset="-78"/>
                 <a:cs typeface="Amiri" pitchFamily="2" charset="-78"/>
               </a:rPr>
               <a:t>مَقَاسٌ</a:t>
@@ -36199,6 +36436,7 @@
                   <a:srgbClr val="1B3B6F"/>
                 </a:solidFill>
                 <a:latin typeface="Amiri" pitchFamily="2" charset="-78"/>
+                <a:ea typeface="Amiri" pitchFamily="2" charset="-78"/>
                 <a:cs typeface="Amiri" pitchFamily="2" charset="-78"/>
               </a:rPr>
               <a:t>أَكْبَرُ · أَصْغَرُ</a:t>
@@ -36302,6 +36540,7 @@
                   <a:srgbClr val="1B3B6F"/>
                 </a:solidFill>
                 <a:latin typeface="Amiri" pitchFamily="2" charset="-78"/>
+                <a:ea typeface="Amiri" pitchFamily="2" charset="-78"/>
                 <a:cs typeface="Amiri" pitchFamily="2" charset="-78"/>
               </a:rPr>
               <a:t>مَقَاسَاتٌ</a:t>
@@ -36435,6 +36674,7 @@
                   <a:srgbClr val="D4AF37"/>
                 </a:solidFill>
                 <a:latin typeface="Amiri" pitchFamily="2" charset="-78"/>
+                <a:ea typeface="Amiri" pitchFamily="2" charset="-78"/>
                 <a:cs typeface="Amiri" pitchFamily="2" charset="-78"/>
               </a:rPr>
               <a:t>م</a:t>
@@ -36755,6 +36995,7 @@
                   <a:srgbClr val="8A6D1E"/>
                 </a:solidFill>
                 <a:latin typeface="Amiri" pitchFamily="2" charset="-78"/>
+                <a:ea typeface="Amiri" pitchFamily="2" charset="-78"/>
                 <a:cs typeface="Amiri" pitchFamily="2" charset="-78"/>
               </a:rPr>
               <a:t>مُشْكِلَةٌ فِي المَحَلِّ</a:t>
@@ -37058,6 +37299,7 @@
                   <a:srgbClr val="1B3B6F"/>
                 </a:solidFill>
                 <a:latin typeface="Amiri" pitchFamily="2" charset="-78"/>
+                <a:ea typeface="Amiri" pitchFamily="2" charset="-78"/>
                 <a:cs typeface="Amiri" pitchFamily="2" charset="-78"/>
               </a:rPr>
               <a:t>أَدْفَعُ</a:t>
@@ -37215,6 +37457,7 @@
                   <a:srgbClr val="1B3B6F"/>
                 </a:solidFill>
                 <a:latin typeface="Amiri" pitchFamily="2" charset="-78"/>
+                <a:ea typeface="Amiri" pitchFamily="2" charset="-78"/>
                 <a:cs typeface="Amiri" pitchFamily="2" charset="-78"/>
               </a:rPr>
               <a:t>الدَّفْعُ</a:t>
@@ -37318,6 +37561,7 @@
                   <a:srgbClr val="1B3B6F"/>
                 </a:solidFill>
                 <a:latin typeface="Amiri" pitchFamily="2" charset="-78"/>
+                <a:ea typeface="Amiri" pitchFamily="2" charset="-78"/>
                 <a:cs typeface="Amiri" pitchFamily="2" charset="-78"/>
               </a:rPr>
               <a:t>نَقْدًا</a:t>
@@ -37421,6 +37665,7 @@
                   <a:srgbClr val="1B3B6F"/>
                 </a:solidFill>
                 <a:latin typeface="Amiri" pitchFamily="2" charset="-78"/>
+                <a:ea typeface="Amiri" pitchFamily="2" charset="-78"/>
                 <a:cs typeface="Amiri" pitchFamily="2" charset="-78"/>
               </a:rPr>
               <a:t>بِالبِطَاقَةِ</a:t>
@@ -37686,6 +37931,7 @@
                   <a:srgbClr val="1B3B6F"/>
                 </a:solidFill>
                 <a:latin typeface="Amiri" pitchFamily="2" charset="-78"/>
+                <a:ea typeface="Amiri" pitchFamily="2" charset="-78"/>
                 <a:cs typeface="Amiri" pitchFamily="2" charset="-78"/>
               </a:rPr>
               <a:t>أَشْتَرِي</a:t>
@@ -37843,6 +38089,7 @@
                   <a:srgbClr val="1B3B6F"/>
                 </a:solidFill>
                 <a:latin typeface="Amiri" pitchFamily="2" charset="-78"/>
+                <a:ea typeface="Amiri" pitchFamily="2" charset="-78"/>
                 <a:cs typeface="Amiri" pitchFamily="2" charset="-78"/>
               </a:rPr>
               <a:t>مُشْتَرَيَاتٌ</a:t>
@@ -37946,6 +38193,7 @@
                   <a:srgbClr val="1B3B6F"/>
                 </a:solidFill>
                 <a:latin typeface="Amiri" pitchFamily="2" charset="-78"/>
+                <a:ea typeface="Amiri" pitchFamily="2" charset="-78"/>
                 <a:cs typeface="Amiri" pitchFamily="2" charset="-78"/>
               </a:rPr>
               <a:t>سَأَشْتَرِي</a:t>
@@ -38049,6 +38297,7 @@
                   <a:srgbClr val="1B3B6F"/>
                 </a:solidFill>
                 <a:latin typeface="Amiri" pitchFamily="2" charset="-78"/>
+                <a:ea typeface="Amiri" pitchFamily="2" charset="-78"/>
                 <a:cs typeface="Amiri" pitchFamily="2" charset="-78"/>
               </a:rPr>
               <a:t>اشْتَرَيْتُ</a:t>
@@ -38314,6 +38563,7 @@
                   <a:srgbClr val="1B3B6F"/>
                 </a:solidFill>
                 <a:latin typeface="Amiri" pitchFamily="2" charset="-78"/>
+                <a:ea typeface="Amiri" pitchFamily="2" charset="-78"/>
                 <a:cs typeface="Amiri" pitchFamily="2" charset="-78"/>
               </a:rPr>
               <a:t>أُرْجِعُ · أُبَدِّلُ</a:t>
@@ -38471,6 +38721,7 @@
                   <a:srgbClr val="1B3B6F"/>
                 </a:solidFill>
                 <a:latin typeface="Amiri" pitchFamily="2" charset="-78"/>
+                <a:ea typeface="Amiri" pitchFamily="2" charset="-78"/>
                 <a:cs typeface="Amiri" pitchFamily="2" charset="-78"/>
               </a:rPr>
               <a:t>اسْتِرْدَادُ المَالِ</a:t>
@@ -38574,6 +38825,7 @@
                   <a:srgbClr val="1B3B6F"/>
                 </a:solidFill>
                 <a:latin typeface="Amiri" pitchFamily="2" charset="-78"/>
+                <a:ea typeface="Amiri" pitchFamily="2" charset="-78"/>
                 <a:cs typeface="Amiri" pitchFamily="2" charset="-78"/>
               </a:rPr>
               <a:t>أَرْجَعْتُ · بَدَّلْتُ</a:t>
@@ -38839,6 +39091,7 @@
                   <a:srgbClr val="1B3B6F"/>
                 </a:solidFill>
                 <a:latin typeface="Amiri" pitchFamily="2" charset="-78"/>
+                <a:ea typeface="Amiri" pitchFamily="2" charset="-78"/>
                 <a:cs typeface="Amiri" pitchFamily="2" charset="-78"/>
               </a:rPr>
               <a:t>إِيصَالٌ</a:t>
@@ -38996,6 +39249,7 @@
                   <a:srgbClr val="1B3B6F"/>
                 </a:solidFill>
                 <a:latin typeface="Amiri" pitchFamily="2" charset="-78"/>
+                <a:ea typeface="Amiri" pitchFamily="2" charset="-78"/>
                 <a:cs typeface="Amiri" pitchFamily="2" charset="-78"/>
               </a:rPr>
               <a:t>ضَمَانٌ</a:t>
@@ -39099,6 +39353,7 @@
                   <a:srgbClr val="1B3B6F"/>
                 </a:solidFill>
                 <a:latin typeface="Amiri" pitchFamily="2" charset="-78"/>
+                <a:ea typeface="Amiri" pitchFamily="2" charset="-78"/>
                 <a:cs typeface="Amiri" pitchFamily="2" charset="-78"/>
               </a:rPr>
               <a:t>إِيصَالَاتٌ</a:t>
@@ -39364,6 +39619,7 @@
                   <a:srgbClr val="1B3B6F"/>
                 </a:solidFill>
                 <a:latin typeface="Amiri" pitchFamily="2" charset="-78"/>
+                <a:ea typeface="Amiri" pitchFamily="2" charset="-78"/>
                 <a:cs typeface="Amiri" pitchFamily="2" charset="-78"/>
               </a:rPr>
               <a:t>مَكْسُورٌ · مَعِيبٌ</a:t>
@@ -39521,6 +39777,7 @@
                   <a:srgbClr val="1B3B6F"/>
                 </a:solidFill>
                 <a:latin typeface="Amiri" pitchFamily="2" charset="-78"/>
+                <a:ea typeface="Amiri" pitchFamily="2" charset="-78"/>
                 <a:cs typeface="Amiri" pitchFamily="2" charset="-78"/>
               </a:rPr>
               <a:t>لَا يَعْمَلُ · لَا تَعْمَلُ</a:t>
@@ -39624,6 +39881,7 @@
                   <a:srgbClr val="1B3B6F"/>
                 </a:solidFill>
                 <a:latin typeface="Amiri" pitchFamily="2" charset="-78"/>
+                <a:ea typeface="Amiri" pitchFamily="2" charset="-78"/>
                 <a:cs typeface="Amiri" pitchFamily="2" charset="-78"/>
               </a:rPr>
               <a:t>مَكْسُورَةٌ · مَعِيبَةٌ</a:t>
@@ -39889,6 +40147,7 @@
                   <a:srgbClr val="1B3B6F"/>
                 </a:solidFill>
                 <a:latin typeface="Amiri" pitchFamily="2" charset="-78"/>
+                <a:ea typeface="Amiri" pitchFamily="2" charset="-78"/>
                 <a:cs typeface="Amiri" pitchFamily="2" charset="-78"/>
               </a:rPr>
               <a:t>التَّسَوُّقُ عَلَى الإِنْتَرْنِتِ</a:t>
@@ -40046,6 +40305,7 @@
                   <a:srgbClr val="1B3B6F"/>
                 </a:solidFill>
                 <a:latin typeface="Amiri" pitchFamily="2" charset="-78"/>
+                <a:ea typeface="Amiri" pitchFamily="2" charset="-78"/>
                 <a:cs typeface="Amiri" pitchFamily="2" charset="-78"/>
               </a:rPr>
               <a:t>المُسْتَهْلِكُ</a:t>
@@ -40149,6 +40409,7 @@
                   <a:srgbClr val="1B3B6F"/>
                 </a:solidFill>
                 <a:latin typeface="Amiri" pitchFamily="2" charset="-78"/>
+                <a:ea typeface="Amiri" pitchFamily="2" charset="-78"/>
                 <a:cs typeface="Amiri" pitchFamily="2" charset="-78"/>
               </a:rPr>
               <a:t>التَّوْصِيلُ</a:t>
@@ -40282,6 +40543,7 @@
                   <a:srgbClr val="D4AF37"/>
                 </a:solidFill>
                 <a:latin typeface="Amiri" pitchFamily="2" charset="-78"/>
+                <a:ea typeface="Amiri" pitchFamily="2" charset="-78"/>
                 <a:cs typeface="Amiri" pitchFamily="2" charset="-78"/>
               </a:rPr>
               <a:t>م</a:t>
@@ -40602,6 +40864,7 @@
                   <a:srgbClr val="8A6D1E"/>
                 </a:solidFill>
                 <a:latin typeface="Amiri" pitchFamily="2" charset="-78"/>
+                <a:ea typeface="Amiri" pitchFamily="2" charset="-78"/>
                 <a:cs typeface="Amiri" pitchFamily="2" charset="-78"/>
               </a:rPr>
               <a:t>فِي الغُرَفِ</a:t>
@@ -41778,6 +42041,7 @@
                   <a:srgbClr val="1B3B6F"/>
                 </a:solidFill>
                 <a:latin typeface="Amiri" pitchFamily="2" charset="-78"/>
+                <a:ea typeface="Amiri" pitchFamily="2" charset="-78"/>
                 <a:cs typeface="Amiri" pitchFamily="2" charset="-78"/>
               </a:rPr>
               <a:t>دَوْرُكَ!</a:t>
@@ -41854,6 +42118,7 @@
                   <a:srgbClr val="1B3B6F"/>
                 </a:solidFill>
                 <a:latin typeface="Amiri" pitchFamily="2" charset="-78"/>
+                <a:ea typeface="Amiri" pitchFamily="2" charset="-78"/>
                 <a:cs typeface="Amiri" pitchFamily="2" charset="-78"/>
               </a:rPr>
               <a:t>أَحْسَنْتَ! / أَحْسَنْتِ!</a:t>
@@ -41930,6 +42195,7 @@
                   <a:srgbClr val="1B3B6F"/>
                 </a:solidFill>
                 <a:latin typeface="Amiri" pitchFamily="2" charset="-78"/>
+                <a:ea typeface="Amiri" pitchFamily="2" charset="-78"/>
                 <a:cs typeface="Amiri" pitchFamily="2" charset="-78"/>
               </a:rPr>
               <a:t>تَكَلَّمْ أَكْثَرَ، مِنْ فَضْلِكَ</a:t>
@@ -42006,6 +42272,7 @@
                   <a:srgbClr val="1B3B6F"/>
                 </a:solidFill>
                 <a:latin typeface="Amiri" pitchFamily="2" charset="-78"/>
+                <a:ea typeface="Amiri" pitchFamily="2" charset="-78"/>
                 <a:cs typeface="Amiri" pitchFamily="2" charset="-78"/>
               </a:rPr>
               <a:t>لِمَاذَا؟</a:t>
@@ -42177,6 +42444,7 @@
                   <a:srgbClr val="D4AF37"/>
                 </a:solidFill>
                 <a:latin typeface="Amiri" pitchFamily="2" charset="-78"/>
+                <a:ea typeface="Amiri" pitchFamily="2" charset="-78"/>
                 <a:cs typeface="Amiri" pitchFamily="2" charset="-78"/>
               </a:rPr>
               <a:t>م</a:t>
@@ -42497,6 +42765,7 @@
                   <a:srgbClr val="8A6D1E"/>
                 </a:solidFill>
                 <a:latin typeface="Amiri" pitchFamily="2" charset="-78"/>
+                <a:ea typeface="Amiri" pitchFamily="2" charset="-78"/>
                 <a:cs typeface="Amiri" pitchFamily="2" charset="-78"/>
               </a:rPr>
               <a:t>فِي مَحَلِّ المَلَابِسِ</a:t>
@@ -42777,6 +43046,7 @@
                   <a:srgbClr val="1B3B6F"/>
                 </a:solidFill>
                 <a:latin typeface="Amiri" pitchFamily="2" charset="-78"/>
+                <a:ea typeface="Amiri" pitchFamily="2" charset="-78"/>
                 <a:cs typeface="Amiri" pitchFamily="2" charset="-78"/>
               </a:rPr>
               <a:t>أَبْحَثُ عَنْ …</a:t>
@@ -42853,6 +43123,7 @@
                   <a:srgbClr val="1B3B6F"/>
                 </a:solidFill>
                 <a:latin typeface="Amiri" pitchFamily="2" charset="-78"/>
+                <a:ea typeface="Amiri" pitchFamily="2" charset="-78"/>
                 <a:cs typeface="Amiri" pitchFamily="2" charset="-78"/>
               </a:rPr>
               <a:t>أَهْلًا، هَلْ أُسَاعِدُكَ؟</a:t>
@@ -43021,6 +43292,7 @@
                   <a:srgbClr val="1B3B6F"/>
                 </a:solidFill>
                 <a:latin typeface="Amiri" pitchFamily="2" charset="-78"/>
+                <a:ea typeface="Amiri" pitchFamily="2" charset="-78"/>
                 <a:cs typeface="Amiri" pitchFamily="2" charset="-78"/>
               </a:rPr>
               <a:t>مَقَاسِي …</a:t>
@@ -43097,6 +43369,7 @@
                   <a:srgbClr val="1B3B6F"/>
                 </a:solidFill>
                 <a:latin typeface="Amiri" pitchFamily="2" charset="-78"/>
+                <a:ea typeface="Amiri" pitchFamily="2" charset="-78"/>
                 <a:cs typeface="Amiri" pitchFamily="2" charset="-78"/>
               </a:rPr>
               <a:t>مَا مَقَاسُكَ؟</a:t>
@@ -43265,6 +43538,7 @@
                   <a:srgbClr val="1B3B6F"/>
                 </a:solidFill>
                 <a:latin typeface="Amiri" pitchFamily="2" charset="-78"/>
+                <a:ea typeface="Amiri" pitchFamily="2" charset="-78"/>
                 <a:cs typeface="Amiri" pitchFamily="2" charset="-78"/>
               </a:rPr>
               <a:t>كَمْ ثَمَنُهَا؟</a:t>
@@ -43341,6 +43615,7 @@
                   <a:srgbClr val="1B3B6F"/>
                 </a:solidFill>
                 <a:latin typeface="Amiri" pitchFamily="2" charset="-78"/>
+                <a:ea typeface="Amiri" pitchFamily="2" charset="-78"/>
                 <a:cs typeface="Amiri" pitchFamily="2" charset="-78"/>
               </a:rPr>
               <a:t>تَفَضَّلْ، هٰذِهِ الكَنْزَةُ جَمِيلَةٌ.</a:t>
@@ -43509,6 +43784,7 @@
                   <a:srgbClr val="1B3B6F"/>
                 </a:solidFill>
                 <a:latin typeface="Amiri" pitchFamily="2" charset="-78"/>
+                <a:ea typeface="Amiri" pitchFamily="2" charset="-78"/>
                 <a:cs typeface="Amiri" pitchFamily="2" charset="-78"/>
               </a:rPr>
               <a:t>هِيَ غَالِيَةٌ … هَلْ عِنْدَكَ … أَرْخَصُ؟</a:t>
@@ -43585,6 +43861,7 @@
                   <a:srgbClr val="1B3B6F"/>
                 </a:solidFill>
                 <a:latin typeface="Amiri" pitchFamily="2" charset="-78"/>
+                <a:ea typeface="Amiri" pitchFamily="2" charset="-78"/>
                 <a:cs typeface="Amiri" pitchFamily="2" charset="-78"/>
               </a:rPr>
               <a:t>ثَمَنُهَا ثَلَاثُونَ جُنَيْهًا.</a:t>
@@ -43753,6 +44030,7 @@
                   <a:srgbClr val="1B3B6F"/>
                 </a:solidFill>
                 <a:latin typeface="Amiri" pitchFamily="2" charset="-78"/>
+                <a:ea typeface="Amiri" pitchFamily="2" charset="-78"/>
                 <a:cs typeface="Amiri" pitchFamily="2" charset="-78"/>
               </a:rPr>
               <a:t>سَأَدْفَعُ بِالبِطَاقَةِ / نَقْدًا</a:t>
@@ -43829,6 +44107,7 @@
                   <a:srgbClr val="1B3B6F"/>
                 </a:solidFill>
                 <a:latin typeface="Amiri" pitchFamily="2" charset="-78"/>
+                <a:ea typeface="Amiri" pitchFamily="2" charset="-78"/>
                 <a:cs typeface="Amiri" pitchFamily="2" charset="-78"/>
               </a:rPr>
               <a:t>كَيْفَ تُرِيدُ أَنْ تَدْفَعَ؟</a:t>
@@ -44103,6 +44382,7 @@
                   <a:srgbClr val="D4AF37"/>
                 </a:solidFill>
                 <a:latin typeface="Amiri" pitchFamily="2" charset="-78"/>
+                <a:ea typeface="Amiri" pitchFamily="2" charset="-78"/>
                 <a:cs typeface="Amiri" pitchFamily="2" charset="-78"/>
               </a:rPr>
               <a:t>م</a:t>
@@ -44423,6 +44703,7 @@
                   <a:srgbClr val="8A6D1E"/>
                 </a:solidFill>
                 <a:latin typeface="Amiri" pitchFamily="2" charset="-78"/>
+                <a:ea typeface="Amiri" pitchFamily="2" charset="-78"/>
                 <a:cs typeface="Amiri" pitchFamily="2" charset="-78"/>
               </a:rPr>
               <a:t>اخْتِيَارُ سَمَّاعَاتٍ</a:t>
@@ -44703,6 +44984,7 @@
                   <a:srgbClr val="1B3B6F"/>
                 </a:solidFill>
                 <a:latin typeface="Amiri" pitchFamily="2" charset="-78"/>
+                <a:ea typeface="Amiri" pitchFamily="2" charset="-78"/>
                 <a:cs typeface="Amiri" pitchFamily="2" charset="-78"/>
               </a:rPr>
               <a:t>أَحْتَاجُ إِلَى … لِلدِّرَاسَةِ</a:t>
@@ -44779,6 +45061,7 @@
                   <a:srgbClr val="1B3B6F"/>
                 </a:solidFill>
                 <a:latin typeface="Amiri" pitchFamily="2" charset="-78"/>
+                <a:ea typeface="Amiri" pitchFamily="2" charset="-78"/>
                 <a:cs typeface="Amiri" pitchFamily="2" charset="-78"/>
               </a:rPr>
               <a:t>نَعَمْ؟ مَاذَا تَحْتَاجُ؟</a:t>
@@ -44947,6 +45230,7 @@
                   <a:srgbClr val="1B3B6F"/>
                 </a:solidFill>
                 <a:latin typeface="Amiri" pitchFamily="2" charset="-78"/>
+                <a:ea typeface="Amiri" pitchFamily="2" charset="-78"/>
                 <a:cs typeface="Amiri" pitchFamily="2" charset="-78"/>
               </a:rPr>
               <a:t>مَا الفَرْقُ بَيْنَهُمَا؟</a:t>
@@ -45023,6 +45307,7 @@
                   <a:srgbClr val="1B3B6F"/>
                 </a:solidFill>
                 <a:latin typeface="Amiri" pitchFamily="2" charset="-78"/>
+                <a:ea typeface="Amiri" pitchFamily="2" charset="-78"/>
                 <a:cs typeface="Amiri" pitchFamily="2" charset="-78"/>
               </a:rPr>
               <a:t>عِنْدَنَا هٰذِهِ بِأَرْبَعِينَ، وَهٰذِهِ بِسَبْعِينَ جُنَيْهًا.</a:t>
@@ -45191,6 +45476,7 @@
                   <a:srgbClr val="1B3B6F"/>
                 </a:solidFill>
                 <a:latin typeface="Amiri" pitchFamily="2" charset="-78"/>
+                <a:ea typeface="Amiri" pitchFamily="2" charset="-78"/>
                 <a:cs typeface="Amiri" pitchFamily="2" charset="-78"/>
               </a:rPr>
               <a:t>هَلْ … ضَمَانٌ؟ وَكَمْ …؟</a:t>
@@ -45267,6 +45553,7 @@
                   <a:srgbClr val="1B3B6F"/>
                 </a:solidFill>
                 <a:latin typeface="Amiri" pitchFamily="2" charset="-78"/>
+                <a:ea typeface="Amiri" pitchFamily="2" charset="-78"/>
                 <a:cs typeface="Amiri" pitchFamily="2" charset="-78"/>
               </a:rPr>
               <a:t>الغَالِيَةُ لَاسِلْكِيَّةٌ، وَصَوْتُهَا أَنْقَى.</a:t>
@@ -45370,6 +45657,7 @@
                   <a:srgbClr val="1B3B6F"/>
                 </a:solidFill>
                 <a:latin typeface="Amiri" pitchFamily="2" charset="-78"/>
+                <a:ea typeface="Amiri" pitchFamily="2" charset="-78"/>
                 <a:cs typeface="Amiri" pitchFamily="2" charset="-78"/>
               </a:rPr>
               <a:t>سَآخُذُ … لِأَنَّهَا أَ… وَ…</a:t>
@@ -45446,6 +45734,7 @@
                   <a:srgbClr val="1B3B6F"/>
                 </a:solidFill>
                 <a:latin typeface="Amiri" pitchFamily="2" charset="-78"/>
+                <a:ea typeface="Amiri" pitchFamily="2" charset="-78"/>
                 <a:cs typeface="Amiri" pitchFamily="2" charset="-78"/>
               </a:rPr>
               <a:t>سَنَتَانِ لِلْغَالِيَةِ، وَسَنَةٌ لِلرَّخِيصَةِ.</a:t>
@@ -45549,6 +45838,7 @@
                   <a:srgbClr val="1B3B6F"/>
                 </a:solidFill>
                 <a:latin typeface="Amiri" pitchFamily="2" charset="-78"/>
+                <a:ea typeface="Amiri" pitchFamily="2" charset="-78"/>
                 <a:cs typeface="Amiri" pitchFamily="2" charset="-78"/>
               </a:rPr>
               <a:t>أَحْيَانًا، لٰكِنِّي أُفَضِّلُ … لِأَنَّ …</a:t>
@@ -45625,6 +45915,7 @@
                   <a:srgbClr val="1B3B6F"/>
                 </a:solidFill>
                 <a:latin typeface="Amiri" pitchFamily="2" charset="-78"/>
+                <a:ea typeface="Amiri" pitchFamily="2" charset="-78"/>
                 <a:cs typeface="Amiri" pitchFamily="2" charset="-78"/>
               </a:rPr>
               <a:t>هَلْ تَشْتَرِي الأَجْهِزَةَ عَلَى الإِنْتَرْنِتِ عَادَةً؟</a:t>
@@ -45799,13 +46090,9 @@
     <a:fontScheme name="Office">
       <a:majorFont>
         <a:latin typeface="Calibri Light" panose="020F0302020204030204"/>
-        <a:ea typeface=""/>
-        <a:cs typeface=""/>
-        <a:font script="Jpan" typeface="游ゴシック Light"/>
-        <a:font script="Hang" typeface="맑은 고딕"/>
-        <a:font script="Hans" typeface="等线 Light"/>
-        <a:font script="Hant" typeface="新細明體"/>
-        <a:font script="Arab" typeface="Times New Roman"/>
+        <a:ea typeface="Amiri" pitchFamily="2" charset="-78"/>
+        <a:cs typeface="Amiri" pitchFamily="2" charset="-78"/>
+        <a:font script="Arab" typeface="Amiri"/>
         <a:font script="Hebr" typeface="Times New Roman"/>
         <a:font script="Thai" typeface="Angsana New"/>
         <a:font script="Ethi" typeface="Nyala"/>
@@ -45851,13 +46138,9 @@
       </a:majorFont>
       <a:minorFont>
         <a:latin typeface="Calibri" panose="020F0502020204030204"/>
-        <a:ea typeface=""/>
-        <a:cs typeface=""/>
-        <a:font script="Jpan" typeface="游ゴシック"/>
-        <a:font script="Hang" typeface="맑은 고딕"/>
-        <a:font script="Hans" typeface="等线"/>
-        <a:font script="Hant" typeface="新細明體"/>
-        <a:font script="Arab" typeface="Arial"/>
+        <a:ea typeface="Amiri" pitchFamily="2" charset="-78"/>
+        <a:cs typeface="Amiri" pitchFamily="2" charset="-78"/>
+        <a:font script="Arab" typeface="Amiri"/>
         <a:font script="Hebr" typeface="Arial"/>
         <a:font script="Thai" typeface="Cordia New"/>
         <a:font script="Ethi" typeface="Nyala"/>
